--- a/03.三角比/三角比.pptx
+++ b/03.三角比/三角比.pptx
@@ -7419,7 +7419,19 @@
             </a:br>
             <a:r>
               <a:rPr lang="ja-JP" altLang="en-US" dirty="0"/>
-              <a:t>度は傾きを表すものであり、それを拡張して回転なども考えることとなります。</a:t>
+              <a:t>度や</a:t>
+            </a:r>
+            <a:r>
+              <a:rPr lang="en-US" altLang="ja-JP" dirty="0"/>
+              <a:t>[rad]</a:t>
+            </a:r>
+            <a:r>
+              <a:rPr lang="ja-JP" altLang="en-US"/>
+              <a:t>は傾き</a:t>
+            </a:r>
+            <a:r>
+              <a:rPr lang="ja-JP" altLang="en-US" dirty="0"/>
+              <a:t>を表すものであり、それを拡張して回転なども考えることとなります。</a:t>
             </a:r>
             <a:br>
               <a:rPr lang="en-US" altLang="ja-JP" dirty="0"/>
@@ -7550,8 +7562,8 @@
           </a:p>
         </p:txBody>
       </p:sp>
-      <mc:AlternateContent xmlns:mc="http://schemas.openxmlformats.org/markup-compatibility/2006">
-        <mc:Choice xmlns:a14="http://schemas.microsoft.com/office/drawing/2010/main" Requires="a14">
+      <mc:AlternateContent xmlns:mc="http://schemas.openxmlformats.org/markup-compatibility/2006" xmlns:a14="http://schemas.microsoft.com/office/drawing/2010/main">
+        <mc:Choice Requires="a14">
           <p:sp>
             <p:nvSpPr>
               <p:cNvPr id="2" name="テキスト ボックス 1">
@@ -7750,7 +7762,7 @@
             </p:txBody>
           </p:sp>
         </mc:Choice>
-        <mc:Fallback>
+        <mc:Fallback xmlns="">
           <p:sp>
             <p:nvSpPr>
               <p:cNvPr id="2" name="テキスト ボックス 1">
@@ -7795,8 +7807,8 @@
           </p:sp>
         </mc:Fallback>
       </mc:AlternateContent>
-      <mc:AlternateContent xmlns:mc="http://schemas.openxmlformats.org/markup-compatibility/2006">
-        <mc:Choice xmlns:a14="http://schemas.microsoft.com/office/drawing/2010/main" Requires="a14">
+      <mc:AlternateContent xmlns:mc="http://schemas.openxmlformats.org/markup-compatibility/2006" xmlns:a14="http://schemas.microsoft.com/office/drawing/2010/main">
+        <mc:Choice Requires="a14">
           <p:sp>
             <p:nvSpPr>
               <p:cNvPr id="3" name="テキスト ボックス 2">
@@ -7996,7 +8008,7 @@
             </p:txBody>
           </p:sp>
         </mc:Choice>
-        <mc:Fallback>
+        <mc:Fallback xmlns="">
           <p:sp>
             <p:nvSpPr>
               <p:cNvPr id="3" name="テキスト ボックス 2">
@@ -8041,8 +8053,8 @@
           </p:sp>
         </mc:Fallback>
       </mc:AlternateContent>
-      <mc:AlternateContent xmlns:mc="http://schemas.openxmlformats.org/markup-compatibility/2006">
-        <mc:Choice xmlns:a14="http://schemas.microsoft.com/office/drawing/2010/main" Requires="a14">
+      <mc:AlternateContent xmlns:mc="http://schemas.openxmlformats.org/markup-compatibility/2006" xmlns:a14="http://schemas.microsoft.com/office/drawing/2010/main">
+        <mc:Choice Requires="a14">
           <p:sp>
             <p:nvSpPr>
               <p:cNvPr id="4" name="テキスト ボックス 3">
@@ -8214,7 +8226,7 @@
             </p:txBody>
           </p:sp>
         </mc:Choice>
-        <mc:Fallback>
+        <mc:Fallback xmlns="">
           <p:sp>
             <p:nvSpPr>
               <p:cNvPr id="4" name="テキスト ボックス 3">
@@ -8259,8 +8271,8 @@
           </p:sp>
         </mc:Fallback>
       </mc:AlternateContent>
-      <mc:AlternateContent xmlns:mc="http://schemas.openxmlformats.org/markup-compatibility/2006">
-        <mc:Choice xmlns:a14="http://schemas.microsoft.com/office/drawing/2010/main" Requires="a14">
+      <mc:AlternateContent xmlns:mc="http://schemas.openxmlformats.org/markup-compatibility/2006" xmlns:a14="http://schemas.microsoft.com/office/drawing/2010/main">
+        <mc:Choice Requires="a14">
           <p:sp>
             <p:nvSpPr>
               <p:cNvPr id="5" name="テキスト ボックス 4">
@@ -8313,7 +8325,7 @@
                     <m:f>
                       <m:fPr>
                         <m:ctrlPr>
-                          <a:rPr kumimoji="1" lang="ja-JP" altLang="en-US" sz="1400" smtClean="0">
+                          <a:rPr kumimoji="1" lang="ja-JP" altLang="en-US" sz="1400" i="1" smtClean="0">
                             <a:latin typeface="Cambria Math" panose="02040503050406030204" pitchFamily="18" charset="0"/>
                           </a:rPr>
                         </m:ctrlPr>
@@ -8352,7 +8364,7 @@
             </p:txBody>
           </p:sp>
         </mc:Choice>
-        <mc:Fallback>
+        <mc:Fallback xmlns="">
           <p:sp>
             <p:nvSpPr>
               <p:cNvPr id="5" name="テキスト ボックス 4">
@@ -8449,8 +8461,8 @@
           </a:p>
         </p:txBody>
       </p:sp>
-      <mc:AlternateContent xmlns:mc="http://schemas.openxmlformats.org/markup-compatibility/2006">
-        <mc:Choice xmlns:a14="http://schemas.microsoft.com/office/drawing/2010/main" Requires="a14">
+      <mc:AlternateContent xmlns:mc="http://schemas.openxmlformats.org/markup-compatibility/2006" xmlns:a14="http://schemas.microsoft.com/office/drawing/2010/main">
+        <mc:Choice Requires="a14">
           <p:sp>
             <p:nvSpPr>
               <p:cNvPr id="7" name="テキスト ボックス 6">
@@ -8500,7 +8512,7 @@
             </p:txBody>
           </p:sp>
         </mc:Choice>
-        <mc:Fallback>
+        <mc:Fallback xmlns="">
           <p:sp>
             <p:nvSpPr>
               <p:cNvPr id="7" name="テキスト ボックス 6">
@@ -8545,8 +8557,8 @@
           </p:sp>
         </mc:Fallback>
       </mc:AlternateContent>
-      <mc:AlternateContent xmlns:mc="http://schemas.openxmlformats.org/markup-compatibility/2006">
-        <mc:Choice xmlns:p14="http://schemas.microsoft.com/office/powerpoint/2010/main" Requires="p14">
+      <mc:AlternateContent xmlns:mc="http://schemas.openxmlformats.org/markup-compatibility/2006" xmlns:p14="http://schemas.microsoft.com/office/powerpoint/2010/main">
+        <mc:Choice Requires="p14">
           <p:contentPart p14:bwMode="auto" r:id="rId7">
             <p14:nvContentPartPr>
               <p14:cNvPr id="9" name="インク 8">
@@ -8565,7 +8577,7 @@
             </p14:xfrm>
           </p:contentPart>
         </mc:Choice>
-        <mc:Fallback>
+        <mc:Fallback xmlns="">
           <p:pic>
             <p:nvPicPr>
               <p:cNvPr id="9" name="インク 8">
@@ -8719,8 +8731,8 @@
           </mc:Fallback>
         </mc:AlternateContent>
       </p:grpSp>
-      <mc:AlternateContent xmlns:mc="http://schemas.openxmlformats.org/markup-compatibility/2006">
-        <mc:Choice xmlns:a14="http://schemas.microsoft.com/office/drawing/2010/main" Requires="a14">
+      <mc:AlternateContent xmlns:mc="http://schemas.openxmlformats.org/markup-compatibility/2006" xmlns:a14="http://schemas.microsoft.com/office/drawing/2010/main">
+        <mc:Choice Requires="a14">
           <p:sp>
             <p:nvSpPr>
               <p:cNvPr id="13" name="テキスト ボックス 12">
@@ -8777,7 +8789,7 @@
                     <m:f>
                       <m:fPr>
                         <m:ctrlPr>
-                          <a:rPr kumimoji="1" lang="ja-JP" altLang="en-US" sz="1400" smtClean="0">
+                          <a:rPr kumimoji="1" lang="ja-JP" altLang="en-US" sz="1400" i="1" smtClean="0">
                             <a:latin typeface="Cambria Math" panose="02040503050406030204" pitchFamily="18" charset="0"/>
                           </a:rPr>
                         </m:ctrlPr>
@@ -8816,7 +8828,7 @@
             </p:txBody>
           </p:sp>
         </mc:Choice>
-        <mc:Fallback>
+        <mc:Fallback xmlns="">
           <p:sp>
             <p:nvSpPr>
               <p:cNvPr id="13" name="テキスト ボックス 12">
@@ -8913,8 +8925,8 @@
           </a:p>
         </p:txBody>
       </p:sp>
-      <mc:AlternateContent xmlns:mc="http://schemas.openxmlformats.org/markup-compatibility/2006">
-        <mc:Choice xmlns:a14="http://schemas.microsoft.com/office/drawing/2010/main" Requires="a14">
+      <mc:AlternateContent xmlns:mc="http://schemas.openxmlformats.org/markup-compatibility/2006" xmlns:a14="http://schemas.microsoft.com/office/drawing/2010/main">
+        <mc:Choice Requires="a14">
           <p:sp>
             <p:nvSpPr>
               <p:cNvPr id="15" name="テキスト ボックス 14">
@@ -8964,7 +8976,7 @@
             </p:txBody>
           </p:sp>
         </mc:Choice>
-        <mc:Fallback>
+        <mc:Fallback xmlns="">
           <p:sp>
             <p:nvSpPr>
               <p:cNvPr id="15" name="テキスト ボックス 14">
@@ -9009,8 +9021,8 @@
           </p:sp>
         </mc:Fallback>
       </mc:AlternateContent>
-      <mc:AlternateContent xmlns:mc="http://schemas.openxmlformats.org/markup-compatibility/2006">
-        <mc:Choice xmlns:p14="http://schemas.microsoft.com/office/powerpoint/2010/main" Requires="p14">
+      <mc:AlternateContent xmlns:mc="http://schemas.openxmlformats.org/markup-compatibility/2006" xmlns:p14="http://schemas.microsoft.com/office/powerpoint/2010/main">
+        <mc:Choice Requires="p14">
           <p:contentPart p14:bwMode="auto" r:id="rId70">
             <p14:nvContentPartPr>
               <p14:cNvPr id="16" name="インク 15">
@@ -9029,7 +9041,7 @@
             </p14:xfrm>
           </p:contentPart>
         </mc:Choice>
-        <mc:Fallback>
+        <mc:Fallback xmlns="">
           <p:pic>
             <p:nvPicPr>
               <p:cNvPr id="16" name="インク 15">
@@ -9788,8 +9800,8 @@
           </a:p>
         </p:txBody>
       </p:sp>
-      <mc:AlternateContent xmlns:mc="http://schemas.openxmlformats.org/markup-compatibility/2006">
-        <mc:Choice xmlns:a14="http://schemas.microsoft.com/office/drawing/2010/main" Requires="a14">
+      <mc:AlternateContent xmlns:mc="http://schemas.openxmlformats.org/markup-compatibility/2006" xmlns:a14="http://schemas.microsoft.com/office/drawing/2010/main">
+        <mc:Choice Requires="a14">
           <p:sp>
             <p:nvSpPr>
               <p:cNvPr id="13" name="テキスト ボックス 12">
@@ -10129,7 +10141,7 @@
             </p:txBody>
           </p:sp>
         </mc:Choice>
-        <mc:Fallback>
+        <mc:Fallback xmlns="">
           <p:sp>
             <p:nvSpPr>
               <p:cNvPr id="13" name="テキスト ボックス 12">
@@ -10289,8 +10301,8 @@
           </a:p>
         </p:txBody>
       </p:sp>
-      <mc:AlternateContent xmlns:mc="http://schemas.openxmlformats.org/markup-compatibility/2006">
-        <mc:Choice xmlns:a14="http://schemas.microsoft.com/office/drawing/2010/main" Requires="a14">
+      <mc:AlternateContent xmlns:mc="http://schemas.openxmlformats.org/markup-compatibility/2006" xmlns:a14="http://schemas.microsoft.com/office/drawing/2010/main">
+        <mc:Choice Requires="a14">
           <p:sp>
             <p:nvSpPr>
               <p:cNvPr id="7" name="object 70">
@@ -10383,7 +10395,7 @@
                     <m:f>
                       <m:fPr>
                         <m:ctrlPr>
-                          <a:rPr lang="ja-JP" altLang="en-US" sz="2400" spc="30" smtClean="0">
+                          <a:rPr lang="ja-JP" altLang="en-US" sz="2400" i="1" spc="30" smtClean="0">
                             <a:latin typeface="Cambria Math" panose="02040503050406030204" pitchFamily="18" charset="0"/>
                           </a:rPr>
                         </m:ctrlPr>
@@ -10499,7 +10511,7 @@
             </p:txBody>
           </p:sp>
         </mc:Choice>
-        <mc:Fallback>
+        <mc:Fallback xmlns="">
           <p:sp>
             <p:nvSpPr>
               <p:cNvPr id="7" name="object 70">
@@ -10818,8 +10830,8 @@
           </a:p>
         </p:txBody>
       </p:sp>
-      <mc:AlternateContent xmlns:mc="http://schemas.openxmlformats.org/markup-compatibility/2006">
-        <mc:Choice xmlns:a14="http://schemas.microsoft.com/office/drawing/2010/main" Requires="a14">
+      <mc:AlternateContent xmlns:mc="http://schemas.openxmlformats.org/markup-compatibility/2006" xmlns:a14="http://schemas.microsoft.com/office/drawing/2010/main">
+        <mc:Choice Requires="a14">
           <p:sp>
             <p:nvSpPr>
               <p:cNvPr id="74" name="object 70">
@@ -10912,7 +10924,7 @@
                     <m:f>
                       <m:fPr>
                         <m:ctrlPr>
-                          <a:rPr lang="ja-JP" altLang="en-US" sz="2400" spc="30" smtClean="0">
+                          <a:rPr lang="ja-JP" altLang="en-US" sz="2400" i="1" spc="30" smtClean="0">
                             <a:latin typeface="Cambria Math" panose="02040503050406030204" pitchFamily="18" charset="0"/>
                           </a:rPr>
                         </m:ctrlPr>
@@ -11028,7 +11040,7 @@
             </p:txBody>
           </p:sp>
         </mc:Choice>
-        <mc:Fallback>
+        <mc:Fallback xmlns="">
           <p:sp>
             <p:nvSpPr>
               <p:cNvPr id="74" name="object 70">
@@ -12867,8 +12879,8 @@
           </a:p>
         </p:txBody>
       </p:sp>
-      <mc:AlternateContent xmlns:mc="http://schemas.openxmlformats.org/markup-compatibility/2006">
-        <mc:Choice xmlns:a14="http://schemas.microsoft.com/office/drawing/2010/main" Requires="a14">
+      <mc:AlternateContent xmlns:mc="http://schemas.openxmlformats.org/markup-compatibility/2006" xmlns:a14="http://schemas.microsoft.com/office/drawing/2010/main">
+        <mc:Choice Requires="a14">
           <p:sp>
             <p:nvSpPr>
               <p:cNvPr id="192" name="object 50">
@@ -12976,7 +12988,7 @@
                     <m:f>
                       <m:fPr>
                         <m:ctrlPr>
-                          <a:rPr lang="ja-JP" altLang="en-US" sz="900" spc="90" dirty="0" smtClean="0">
+                          <a:rPr lang="ja-JP" altLang="en-US" sz="900" i="1" spc="90" dirty="0" smtClean="0">
                             <a:latin typeface="Cambria Math" panose="02040503050406030204" pitchFamily="18" charset="0"/>
                           </a:rPr>
                         </m:ctrlPr>
@@ -12986,7 +12998,7 @@
                           <m:radPr>
                             <m:degHide m:val="on"/>
                             <m:ctrlPr>
-                              <a:rPr lang="ja-JP" altLang="en-US" sz="900" spc="90" dirty="0" smtClean="0">
+                              <a:rPr lang="ja-JP" altLang="en-US" sz="900" i="1" spc="90" dirty="0" smtClean="0">
                                 <a:latin typeface="Cambria Math" panose="02040503050406030204" pitchFamily="18" charset="0"/>
                               </a:rPr>
                             </m:ctrlPr>
@@ -13028,7 +13040,7 @@
             </p:txBody>
           </p:sp>
         </mc:Choice>
-        <mc:Fallback>
+        <mc:Fallback xmlns="">
           <p:sp>
             <p:nvSpPr>
               <p:cNvPr id="192" name="object 50">
@@ -21097,8 +21109,8 @@
           </p:pic>
         </mc:Fallback>
       </mc:AlternateContent>
-      <mc:AlternateContent xmlns:mc="http://schemas.openxmlformats.org/markup-compatibility/2006">
-        <mc:Choice xmlns:a14="http://schemas.microsoft.com/office/drawing/2010/main" Requires="a14">
+      <mc:AlternateContent xmlns:mc="http://schemas.openxmlformats.org/markup-compatibility/2006" xmlns:a14="http://schemas.microsoft.com/office/drawing/2010/main">
+        <mc:Choice Requires="a14">
           <p:sp>
             <p:nvSpPr>
               <p:cNvPr id="4" name="テキスト ボックス 3">
@@ -21273,7 +21285,7 @@
             </p:txBody>
           </p:sp>
         </mc:Choice>
-        <mc:Fallback>
+        <mc:Fallback xmlns="">
           <p:sp>
             <p:nvSpPr>
               <p:cNvPr id="4" name="テキスト ボックス 3">
@@ -21318,8 +21330,8 @@
           </p:sp>
         </mc:Fallback>
       </mc:AlternateContent>
-      <mc:AlternateContent xmlns:mc="http://schemas.openxmlformats.org/markup-compatibility/2006">
-        <mc:Choice xmlns:a14="http://schemas.microsoft.com/office/drawing/2010/main" Requires="a14">
+      <mc:AlternateContent xmlns:mc="http://schemas.openxmlformats.org/markup-compatibility/2006" xmlns:a14="http://schemas.microsoft.com/office/drawing/2010/main">
+        <mc:Choice Requires="a14">
           <p:sp>
             <p:nvSpPr>
               <p:cNvPr id="5" name="テキスト ボックス 4">
@@ -21503,7 +21515,7 @@
             </p:txBody>
           </p:sp>
         </mc:Choice>
-        <mc:Fallback>
+        <mc:Fallback xmlns="">
           <p:sp>
             <p:nvSpPr>
               <p:cNvPr id="5" name="テキスト ボックス 4">
@@ -21548,8 +21560,8 @@
           </p:sp>
         </mc:Fallback>
       </mc:AlternateContent>
-      <mc:AlternateContent xmlns:mc="http://schemas.openxmlformats.org/markup-compatibility/2006">
-        <mc:Choice xmlns:a14="http://schemas.microsoft.com/office/drawing/2010/main" Requires="a14">
+      <mc:AlternateContent xmlns:mc="http://schemas.openxmlformats.org/markup-compatibility/2006" xmlns:a14="http://schemas.microsoft.com/office/drawing/2010/main">
+        <mc:Choice Requires="a14">
           <p:sp>
             <p:nvSpPr>
               <p:cNvPr id="6" name="テキスト ボックス 5">
@@ -21705,7 +21717,7 @@
             </p:txBody>
           </p:sp>
         </mc:Choice>
-        <mc:Fallback>
+        <mc:Fallback xmlns="">
           <p:sp>
             <p:nvSpPr>
               <p:cNvPr id="6" name="テキスト ボックス 5">

--- a/03.三角比/三角比.pptx
+++ b/03.三角比/三角比.pptx
@@ -4,19 +4,23 @@
   <p:sldMasterIdLst>
     <p:sldMasterId id="2147483648" r:id="rId1"/>
   </p:sldMasterIdLst>
+  <p:notesMasterIdLst>
+    <p:notesMasterId r:id="rId15"/>
+  </p:notesMasterIdLst>
   <p:sldIdLst>
     <p:sldId id="256" r:id="rId2"/>
-    <p:sldId id="257" r:id="rId3"/>
-    <p:sldId id="258" r:id="rId4"/>
-    <p:sldId id="260" r:id="rId5"/>
-    <p:sldId id="261" r:id="rId6"/>
-    <p:sldId id="263" r:id="rId7"/>
-    <p:sldId id="262" r:id="rId8"/>
-    <p:sldId id="265" r:id="rId9"/>
-    <p:sldId id="266" r:id="rId10"/>
-    <p:sldId id="267" r:id="rId11"/>
-    <p:sldId id="264" r:id="rId12"/>
-    <p:sldId id="268" r:id="rId13"/>
+    <p:sldId id="271" r:id="rId3"/>
+    <p:sldId id="257" r:id="rId4"/>
+    <p:sldId id="258" r:id="rId5"/>
+    <p:sldId id="260" r:id="rId6"/>
+    <p:sldId id="261" r:id="rId7"/>
+    <p:sldId id="263" r:id="rId8"/>
+    <p:sldId id="262" r:id="rId9"/>
+    <p:sldId id="265" r:id="rId10"/>
+    <p:sldId id="266" r:id="rId11"/>
+    <p:sldId id="267" r:id="rId12"/>
+    <p:sldId id="264" r:id="rId13"/>
+    <p:sldId id="268" r:id="rId14"/>
   </p:sldIdLst>
   <p:sldSz cx="12192000" cy="6858000"/>
   <p:notesSz cx="6858000" cy="9144000"/>
@@ -3844,6 +3848,498 @@
 </inkml:ink>
 </file>
 
+<file path=ppt/notesMasters/notesMaster1.xml><?xml version="1.0" encoding="utf-8"?>
+<p:notesMaster xmlns:a="http://schemas.openxmlformats.org/drawingml/2006/main" xmlns:r="http://schemas.openxmlformats.org/officeDocument/2006/relationships" xmlns:p="http://schemas.openxmlformats.org/presentationml/2006/main">
+  <p:cSld>
+    <p:bg>
+      <p:bgRef idx="1001">
+        <a:schemeClr val="bg1"/>
+      </p:bgRef>
+    </p:bg>
+    <p:spTree>
+      <p:nvGrpSpPr>
+        <p:cNvPr id="1" name=""/>
+        <p:cNvGrpSpPr/>
+        <p:nvPr/>
+      </p:nvGrpSpPr>
+      <p:grpSpPr>
+        <a:xfrm>
+          <a:off x="0" y="0"/>
+          <a:ext cx="0" cy="0"/>
+          <a:chOff x="0" y="0"/>
+          <a:chExt cx="0" cy="0"/>
+        </a:xfrm>
+      </p:grpSpPr>
+      <p:sp>
+        <p:nvSpPr>
+          <p:cNvPr id="2" name="ヘッダー プレースホルダー 1"/>
+          <p:cNvSpPr>
+            <a:spLocks noGrp="1"/>
+          </p:cNvSpPr>
+          <p:nvPr>
+            <p:ph type="hdr" sz="quarter"/>
+          </p:nvPr>
+        </p:nvSpPr>
+        <p:spPr>
+          <a:xfrm>
+            <a:off x="0" y="0"/>
+            <a:ext cx="2971800" cy="458788"/>
+          </a:xfrm>
+          <a:prstGeom prst="rect">
+            <a:avLst/>
+          </a:prstGeom>
+        </p:spPr>
+        <p:txBody>
+          <a:bodyPr vert="horz" lIns="91440" tIns="45720" rIns="91440" bIns="45720" rtlCol="0"/>
+          <a:lstStyle>
+            <a:lvl1pPr algn="l">
+              <a:defRPr sz="1200"/>
+            </a:lvl1pPr>
+          </a:lstStyle>
+          <a:p>
+            <a:endParaRPr kumimoji="1" lang="ja-JP" altLang="en-US"/>
+          </a:p>
+        </p:txBody>
+      </p:sp>
+      <p:sp>
+        <p:nvSpPr>
+          <p:cNvPr id="3" name="日付プレースホルダー 2"/>
+          <p:cNvSpPr>
+            <a:spLocks noGrp="1"/>
+          </p:cNvSpPr>
+          <p:nvPr>
+            <p:ph type="dt" idx="1"/>
+          </p:nvPr>
+        </p:nvSpPr>
+        <p:spPr>
+          <a:xfrm>
+            <a:off x="3884613" y="0"/>
+            <a:ext cx="2971800" cy="458788"/>
+          </a:xfrm>
+          <a:prstGeom prst="rect">
+            <a:avLst/>
+          </a:prstGeom>
+        </p:spPr>
+        <p:txBody>
+          <a:bodyPr vert="horz" lIns="91440" tIns="45720" rIns="91440" bIns="45720" rtlCol="0"/>
+          <a:lstStyle>
+            <a:lvl1pPr algn="r">
+              <a:defRPr sz="1200"/>
+            </a:lvl1pPr>
+          </a:lstStyle>
+          <a:p>
+            <a:fld id="{6510BEAB-1E3E-438B-AAE1-0A855D360075}" type="datetimeFigureOut">
+              <a:rPr kumimoji="1" lang="ja-JP" altLang="en-US" smtClean="0"/>
+              <a:t>2026/5/6</a:t>
+            </a:fld>
+            <a:endParaRPr kumimoji="1" lang="ja-JP" altLang="en-US"/>
+          </a:p>
+        </p:txBody>
+      </p:sp>
+      <p:sp>
+        <p:nvSpPr>
+          <p:cNvPr id="4" name="スライド イメージ プレースホルダー 3"/>
+          <p:cNvSpPr>
+            <a:spLocks noGrp="1" noRot="1" noChangeAspect="1"/>
+          </p:cNvSpPr>
+          <p:nvPr>
+            <p:ph type="sldImg" idx="2"/>
+          </p:nvPr>
+        </p:nvSpPr>
+        <p:spPr>
+          <a:xfrm>
+            <a:off x="685800" y="1143000"/>
+            <a:ext cx="5486400" cy="3086100"/>
+          </a:xfrm>
+          <a:prstGeom prst="rect">
+            <a:avLst/>
+          </a:prstGeom>
+          <a:noFill/>
+          <a:ln w="12700">
+            <a:solidFill>
+              <a:prstClr val="black"/>
+            </a:solidFill>
+          </a:ln>
+        </p:spPr>
+        <p:txBody>
+          <a:bodyPr vert="horz" lIns="91440" tIns="45720" rIns="91440" bIns="45720" rtlCol="0" anchor="ctr"/>
+          <a:lstStyle/>
+          <a:p>
+            <a:endParaRPr lang="ja-JP" altLang="en-US"/>
+          </a:p>
+        </p:txBody>
+      </p:sp>
+      <p:sp>
+        <p:nvSpPr>
+          <p:cNvPr id="5" name="ノート プレースホルダー 4"/>
+          <p:cNvSpPr>
+            <a:spLocks noGrp="1"/>
+          </p:cNvSpPr>
+          <p:nvPr>
+            <p:ph type="body" sz="quarter" idx="3"/>
+          </p:nvPr>
+        </p:nvSpPr>
+        <p:spPr>
+          <a:xfrm>
+            <a:off x="685800" y="4400550"/>
+            <a:ext cx="5486400" cy="3600450"/>
+          </a:xfrm>
+          <a:prstGeom prst="rect">
+            <a:avLst/>
+          </a:prstGeom>
+        </p:spPr>
+        <p:txBody>
+          <a:bodyPr vert="horz" lIns="91440" tIns="45720" rIns="91440" bIns="45720" rtlCol="0"/>
+          <a:lstStyle/>
+          <a:p>
+            <a:pPr lvl="0"/>
+            <a:r>
+              <a:rPr kumimoji="1" lang="ja-JP" altLang="en-US"/>
+              <a:t>マスター テキストの書式設定</a:t>
+            </a:r>
+          </a:p>
+          <a:p>
+            <a:pPr lvl="1"/>
+            <a:r>
+              <a:rPr kumimoji="1" lang="ja-JP" altLang="en-US"/>
+              <a:t>第 </a:t>
+            </a:r>
+            <a:r>
+              <a:rPr kumimoji="1" lang="en-US" altLang="ja-JP"/>
+              <a:t>2 </a:t>
+            </a:r>
+            <a:r>
+              <a:rPr kumimoji="1" lang="ja-JP" altLang="en-US"/>
+              <a:t>レベル</a:t>
+            </a:r>
+          </a:p>
+          <a:p>
+            <a:pPr lvl="2"/>
+            <a:r>
+              <a:rPr kumimoji="1" lang="ja-JP" altLang="en-US"/>
+              <a:t>第 </a:t>
+            </a:r>
+            <a:r>
+              <a:rPr kumimoji="1" lang="en-US" altLang="ja-JP"/>
+              <a:t>3 </a:t>
+            </a:r>
+            <a:r>
+              <a:rPr kumimoji="1" lang="ja-JP" altLang="en-US"/>
+              <a:t>レベル</a:t>
+            </a:r>
+          </a:p>
+          <a:p>
+            <a:pPr lvl="3"/>
+            <a:r>
+              <a:rPr kumimoji="1" lang="ja-JP" altLang="en-US"/>
+              <a:t>第 </a:t>
+            </a:r>
+            <a:r>
+              <a:rPr kumimoji="1" lang="en-US" altLang="ja-JP"/>
+              <a:t>4 </a:t>
+            </a:r>
+            <a:r>
+              <a:rPr kumimoji="1" lang="ja-JP" altLang="en-US"/>
+              <a:t>レベル</a:t>
+            </a:r>
+          </a:p>
+          <a:p>
+            <a:pPr lvl="4"/>
+            <a:r>
+              <a:rPr kumimoji="1" lang="ja-JP" altLang="en-US"/>
+              <a:t>第 </a:t>
+            </a:r>
+            <a:r>
+              <a:rPr kumimoji="1" lang="en-US" altLang="ja-JP"/>
+              <a:t>5 </a:t>
+            </a:r>
+            <a:r>
+              <a:rPr kumimoji="1" lang="ja-JP" altLang="en-US"/>
+              <a:t>レベル</a:t>
+            </a:r>
+          </a:p>
+        </p:txBody>
+      </p:sp>
+      <p:sp>
+        <p:nvSpPr>
+          <p:cNvPr id="6" name="フッター プレースホルダー 5"/>
+          <p:cNvSpPr>
+            <a:spLocks noGrp="1"/>
+          </p:cNvSpPr>
+          <p:nvPr>
+            <p:ph type="ftr" sz="quarter" idx="4"/>
+          </p:nvPr>
+        </p:nvSpPr>
+        <p:spPr>
+          <a:xfrm>
+            <a:off x="0" y="8685213"/>
+            <a:ext cx="2971800" cy="458787"/>
+          </a:xfrm>
+          <a:prstGeom prst="rect">
+            <a:avLst/>
+          </a:prstGeom>
+        </p:spPr>
+        <p:txBody>
+          <a:bodyPr vert="horz" lIns="91440" tIns="45720" rIns="91440" bIns="45720" rtlCol="0" anchor="b"/>
+          <a:lstStyle>
+            <a:lvl1pPr algn="l">
+              <a:defRPr sz="1200"/>
+            </a:lvl1pPr>
+          </a:lstStyle>
+          <a:p>
+            <a:endParaRPr kumimoji="1" lang="ja-JP" altLang="en-US"/>
+          </a:p>
+        </p:txBody>
+      </p:sp>
+      <p:sp>
+        <p:nvSpPr>
+          <p:cNvPr id="7" name="スライド番号プレースホルダー 6"/>
+          <p:cNvSpPr>
+            <a:spLocks noGrp="1"/>
+          </p:cNvSpPr>
+          <p:nvPr>
+            <p:ph type="sldNum" sz="quarter" idx="5"/>
+          </p:nvPr>
+        </p:nvSpPr>
+        <p:spPr>
+          <a:xfrm>
+            <a:off x="3884613" y="8685213"/>
+            <a:ext cx="2971800" cy="458787"/>
+          </a:xfrm>
+          <a:prstGeom prst="rect">
+            <a:avLst/>
+          </a:prstGeom>
+        </p:spPr>
+        <p:txBody>
+          <a:bodyPr vert="horz" lIns="91440" tIns="45720" rIns="91440" bIns="45720" rtlCol="0" anchor="b"/>
+          <a:lstStyle>
+            <a:lvl1pPr algn="r">
+              <a:defRPr sz="1200"/>
+            </a:lvl1pPr>
+          </a:lstStyle>
+          <a:p>
+            <a:fld id="{85DB5A2C-CDF9-4633-A0C8-38C76E38F0D5}" type="slidenum">
+              <a:rPr kumimoji="1" lang="ja-JP" altLang="en-US" smtClean="0"/>
+              <a:t>‹#›</a:t>
+            </a:fld>
+            <a:endParaRPr kumimoji="1" lang="ja-JP" altLang="en-US"/>
+          </a:p>
+        </p:txBody>
+      </p:sp>
+    </p:spTree>
+    <p:extLst>
+      <p:ext uri="{BB962C8B-B14F-4D97-AF65-F5344CB8AC3E}">
+        <p14:creationId xmlns:p14="http://schemas.microsoft.com/office/powerpoint/2010/main" val="1410095345"/>
+      </p:ext>
+    </p:extLst>
+  </p:cSld>
+  <p:clrMap bg1="lt1" tx1="dk1" bg2="lt2" tx2="dk2" accent1="accent1" accent2="accent2" accent3="accent3" accent4="accent4" accent5="accent5" accent6="accent6" hlink="hlink" folHlink="folHlink"/>
+  <p:notesStyle>
+    <a:lvl1pPr marL="0" algn="l" defTabSz="914400" rtl="0" eaLnBrk="1" latinLnBrk="0" hangingPunct="1">
+      <a:defRPr kumimoji="1" sz="1200" kern="1200">
+        <a:solidFill>
+          <a:schemeClr val="tx1"/>
+        </a:solidFill>
+        <a:latin typeface="+mn-lt"/>
+        <a:ea typeface="+mn-ea"/>
+        <a:cs typeface="+mn-cs"/>
+      </a:defRPr>
+    </a:lvl1pPr>
+    <a:lvl2pPr marL="457200" algn="l" defTabSz="914400" rtl="0" eaLnBrk="1" latinLnBrk="0" hangingPunct="1">
+      <a:defRPr kumimoji="1" sz="1200" kern="1200">
+        <a:solidFill>
+          <a:schemeClr val="tx1"/>
+        </a:solidFill>
+        <a:latin typeface="+mn-lt"/>
+        <a:ea typeface="+mn-ea"/>
+        <a:cs typeface="+mn-cs"/>
+      </a:defRPr>
+    </a:lvl2pPr>
+    <a:lvl3pPr marL="914400" algn="l" defTabSz="914400" rtl="0" eaLnBrk="1" latinLnBrk="0" hangingPunct="1">
+      <a:defRPr kumimoji="1" sz="1200" kern="1200">
+        <a:solidFill>
+          <a:schemeClr val="tx1"/>
+        </a:solidFill>
+        <a:latin typeface="+mn-lt"/>
+        <a:ea typeface="+mn-ea"/>
+        <a:cs typeface="+mn-cs"/>
+      </a:defRPr>
+    </a:lvl3pPr>
+    <a:lvl4pPr marL="1371600" algn="l" defTabSz="914400" rtl="0" eaLnBrk="1" latinLnBrk="0" hangingPunct="1">
+      <a:defRPr kumimoji="1" sz="1200" kern="1200">
+        <a:solidFill>
+          <a:schemeClr val="tx1"/>
+        </a:solidFill>
+        <a:latin typeface="+mn-lt"/>
+        <a:ea typeface="+mn-ea"/>
+        <a:cs typeface="+mn-cs"/>
+      </a:defRPr>
+    </a:lvl4pPr>
+    <a:lvl5pPr marL="1828800" algn="l" defTabSz="914400" rtl="0" eaLnBrk="1" latinLnBrk="0" hangingPunct="1">
+      <a:defRPr kumimoji="1" sz="1200" kern="1200">
+        <a:solidFill>
+          <a:schemeClr val="tx1"/>
+        </a:solidFill>
+        <a:latin typeface="+mn-lt"/>
+        <a:ea typeface="+mn-ea"/>
+        <a:cs typeface="+mn-cs"/>
+      </a:defRPr>
+    </a:lvl5pPr>
+    <a:lvl6pPr marL="2286000" algn="l" defTabSz="914400" rtl="0" eaLnBrk="1" latinLnBrk="0" hangingPunct="1">
+      <a:defRPr kumimoji="1" sz="1200" kern="1200">
+        <a:solidFill>
+          <a:schemeClr val="tx1"/>
+        </a:solidFill>
+        <a:latin typeface="+mn-lt"/>
+        <a:ea typeface="+mn-ea"/>
+        <a:cs typeface="+mn-cs"/>
+      </a:defRPr>
+    </a:lvl6pPr>
+    <a:lvl7pPr marL="2743200" algn="l" defTabSz="914400" rtl="0" eaLnBrk="1" latinLnBrk="0" hangingPunct="1">
+      <a:defRPr kumimoji="1" sz="1200" kern="1200">
+        <a:solidFill>
+          <a:schemeClr val="tx1"/>
+        </a:solidFill>
+        <a:latin typeface="+mn-lt"/>
+        <a:ea typeface="+mn-ea"/>
+        <a:cs typeface="+mn-cs"/>
+      </a:defRPr>
+    </a:lvl7pPr>
+    <a:lvl8pPr marL="3200400" algn="l" defTabSz="914400" rtl="0" eaLnBrk="1" latinLnBrk="0" hangingPunct="1">
+      <a:defRPr kumimoji="1" sz="1200" kern="1200">
+        <a:solidFill>
+          <a:schemeClr val="tx1"/>
+        </a:solidFill>
+        <a:latin typeface="+mn-lt"/>
+        <a:ea typeface="+mn-ea"/>
+        <a:cs typeface="+mn-cs"/>
+      </a:defRPr>
+    </a:lvl8pPr>
+    <a:lvl9pPr marL="3657600" algn="l" defTabSz="914400" rtl="0" eaLnBrk="1" latinLnBrk="0" hangingPunct="1">
+      <a:defRPr kumimoji="1" sz="1200" kern="1200">
+        <a:solidFill>
+          <a:schemeClr val="tx1"/>
+        </a:solidFill>
+        <a:latin typeface="+mn-lt"/>
+        <a:ea typeface="+mn-ea"/>
+        <a:cs typeface="+mn-cs"/>
+      </a:defRPr>
+    </a:lvl9pPr>
+  </p:notesStyle>
+</p:notesMaster>
+</file>
+
+<file path=ppt/notesSlides/notesSlide1.xml><?xml version="1.0" encoding="utf-8"?>
+<p:notes xmlns:a="http://schemas.openxmlformats.org/drawingml/2006/main" xmlns:r="http://schemas.openxmlformats.org/officeDocument/2006/relationships" xmlns:p="http://schemas.openxmlformats.org/presentationml/2006/main" showMasterSp="0" showMasterPhAnim="0">
+  <p:cSld>
+    <p:spTree>
+      <p:nvGrpSpPr>
+        <p:cNvPr id="1" name="Shape 88"/>
+        <p:cNvGrpSpPr/>
+        <p:nvPr/>
+      </p:nvGrpSpPr>
+      <p:grpSpPr>
+        <a:xfrm>
+          <a:off x="0" y="0"/>
+          <a:ext cx="0" cy="0"/>
+          <a:chOff x="0" y="0"/>
+          <a:chExt cx="0" cy="0"/>
+        </a:xfrm>
+      </p:grpSpPr>
+      <p:sp>
+        <p:nvSpPr>
+          <p:cNvPr id="89" name="Google Shape;89;p2:notes"/>
+          <p:cNvSpPr txBox="1">
+            <a:spLocks noGrp="1"/>
+          </p:cNvSpPr>
+          <p:nvPr>
+            <p:ph type="body" idx="1"/>
+          </p:nvPr>
+        </p:nvSpPr>
+        <p:spPr>
+          <a:xfrm>
+            <a:off x="685800" y="4343400"/>
+            <a:ext cx="5486400" cy="4114800"/>
+          </a:xfrm>
+          <a:prstGeom prst="rect">
+            <a:avLst/>
+          </a:prstGeom>
+        </p:spPr>
+        <p:txBody>
+          <a:bodyPr spcFirstLastPara="1" wrap="square" lIns="91425" tIns="91425" rIns="91425" bIns="91425" anchor="t" anchorCtr="0">
+            <a:noAutofit/>
+          </a:bodyPr>
+          <a:lstStyle/>
+          <a:p>
+            <a:pPr marL="0" lvl="0" indent="0" algn="l" rtl="0">
+              <a:spcBef>
+                <a:spcPts val="0"/>
+              </a:spcBef>
+              <a:spcAft>
+                <a:spcPts val="0"/>
+              </a:spcAft>
+              <a:buNone/>
+            </a:pPr>
+            <a:endParaRPr/>
+          </a:p>
+        </p:txBody>
+      </p:sp>
+      <p:sp>
+        <p:nvSpPr>
+          <p:cNvPr id="90" name="Google Shape;90;p2:notes"/>
+          <p:cNvSpPr>
+            <a:spLocks noGrp="1" noRot="1" noChangeAspect="1"/>
+          </p:cNvSpPr>
+          <p:nvPr>
+            <p:ph type="sldImg" idx="2"/>
+          </p:nvPr>
+        </p:nvSpPr>
+        <p:spPr>
+          <a:xfrm>
+            <a:off x="381000" y="685800"/>
+            <a:ext cx="6096000" cy="3429000"/>
+          </a:xfrm>
+          <a:custGeom>
+            <a:avLst/>
+            <a:gdLst/>
+            <a:ahLst/>
+            <a:cxnLst/>
+            <a:rect l="l" t="t" r="r" b="b"/>
+            <a:pathLst>
+              <a:path w="120000" h="120000" extrusionOk="0">
+                <a:moveTo>
+                  <a:pt x="0" y="0"/>
+                </a:moveTo>
+                <a:lnTo>
+                  <a:pt x="120000" y="0"/>
+                </a:lnTo>
+                <a:lnTo>
+                  <a:pt x="120000" y="120000"/>
+                </a:lnTo>
+                <a:lnTo>
+                  <a:pt x="0" y="120000"/>
+                </a:lnTo>
+                <a:close/>
+              </a:path>
+            </a:pathLst>
+          </a:custGeom>
+        </p:spPr>
+        <p:txBody>
+          <a:bodyPr/>
+          <a:lstStyle/>
+          <a:p>
+            <a:endParaRPr lang="ja-JP" altLang="en-US"/>
+          </a:p>
+        </p:txBody>
+      </p:sp>
+    </p:spTree>
+  </p:cSld>
+  <p:clrMapOvr>
+    <a:masterClrMapping/>
+  </p:clrMapOvr>
+</p:notes>
+</file>
+
 <file path=ppt/slideLayouts/slideLayout1.xml><?xml version="1.0" encoding="utf-8"?>
 <p:sldLayout xmlns:a="http://schemas.openxmlformats.org/drawingml/2006/main" xmlns:r="http://schemas.openxmlformats.org/officeDocument/2006/relationships" xmlns:p="http://schemas.openxmlformats.org/presentationml/2006/main" type="title" preserve="1">
   <p:cSld name="タイトル スライド">
@@ -7395,8 +7891,8 @@
         </p:nvSpPr>
         <p:spPr>
           <a:xfrm>
-            <a:off x="1525238" y="4313055"/>
-            <a:ext cx="9417963" cy="1477328"/>
+            <a:off x="3541454" y="4136990"/>
+            <a:ext cx="5109092" cy="461665"/>
           </a:xfrm>
           <a:prstGeom prst="rect">
             <a:avLst/>
@@ -7411,79 +7907,9 @@
           <a:p>
             <a:pPr algn="ctr"/>
             <a:r>
-              <a:rPr lang="ja-JP" altLang="en-US" dirty="0"/>
-              <a:t>角度を考える上での基礎となる三角比に関して解説します。</a:t>
-            </a:r>
-            <a:br>
-              <a:rPr lang="en-US" altLang="ja-JP" dirty="0"/>
-            </a:br>
-            <a:r>
-              <a:rPr lang="ja-JP" altLang="en-US" dirty="0"/>
-              <a:t>度や</a:t>
-            </a:r>
-            <a:r>
-              <a:rPr lang="en-US" altLang="ja-JP" dirty="0"/>
-              <a:t>[rad]</a:t>
-            </a:r>
-            <a:r>
-              <a:rPr lang="ja-JP" altLang="en-US"/>
-              <a:t>は傾き</a:t>
-            </a:r>
-            <a:r>
-              <a:rPr lang="ja-JP" altLang="en-US" dirty="0"/>
-              <a:t>を表すものであり、それを拡張して回転なども考えることとなります。</a:t>
-            </a:r>
-            <a:br>
-              <a:rPr lang="en-US" altLang="ja-JP" dirty="0"/>
-            </a:br>
-            <a:r>
-              <a:rPr lang="ja-JP" altLang="en-US" dirty="0"/>
-              <a:t>物体の運動を考える際に</a:t>
-            </a:r>
-            <a:r>
-              <a:rPr lang="en-US" altLang="ja-JP" dirty="0"/>
-              <a:t>『</a:t>
-            </a:r>
-            <a:r>
-              <a:rPr lang="ja-JP" altLang="en-US" dirty="0"/>
-              <a:t>どれほど傾いているか</a:t>
-            </a:r>
-            <a:r>
-              <a:rPr lang="en-US" altLang="ja-JP" dirty="0"/>
-              <a:t>』</a:t>
-            </a:r>
-          </a:p>
-          <a:p>
-            <a:pPr algn="ctr"/>
-            <a:r>
-              <a:rPr lang="ja-JP" altLang="en-US" dirty="0"/>
-              <a:t>または</a:t>
-            </a:r>
-            <a:r>
-              <a:rPr lang="en-US" altLang="ja-JP" dirty="0"/>
-              <a:t>『</a:t>
-            </a:r>
-            <a:r>
-              <a:rPr lang="ja-JP" altLang="en-US" dirty="0"/>
-              <a:t>どのように回転しているか</a:t>
-            </a:r>
-            <a:r>
-              <a:rPr lang="en-US" altLang="ja-JP" dirty="0"/>
-              <a:t>』</a:t>
-            </a:r>
-            <a:r>
-              <a:rPr lang="ja-JP" altLang="en-US" dirty="0"/>
-              <a:t>というのは絶対に必要です。</a:t>
-            </a:r>
-            <a:endParaRPr lang="en-US" altLang="ja-JP" dirty="0"/>
-          </a:p>
-          <a:p>
-            <a:pPr algn="ctr"/>
-            <a:r>
-              <a:rPr lang="ja-JP" altLang="en-US" dirty="0"/>
-              <a:t>このあたりから躓いてしまう学生が増えますが、大事な部分なので必ず理解しましょう。</a:t>
-            </a:r>
-            <a:endParaRPr kumimoji="1" lang="ja-JP" altLang="en-US" dirty="0"/>
+              <a:rPr kumimoji="1" lang="ja-JP" altLang="en-US" sz="2400" dirty="0"/>
+              <a:t>「角度」から「回転」へと至る基礎</a:t>
+            </a:r>
           </a:p>
         </p:txBody>
       </p:sp>
@@ -7501,6 +7927,361 @@
 </file>
 
 <file path=ppt/slides/slide10.xml><?xml version="1.0" encoding="utf-8"?>
+<p:sld xmlns:a="http://schemas.openxmlformats.org/drawingml/2006/main" xmlns:r="http://schemas.openxmlformats.org/officeDocument/2006/relationships" xmlns:p="http://schemas.openxmlformats.org/presentationml/2006/main">
+  <p:cSld>
+    <p:spTree>
+      <p:nvGrpSpPr>
+        <p:cNvPr id="1" name="">
+          <a:extLst>
+            <a:ext uri="{FF2B5EF4-FFF2-40B4-BE49-F238E27FC236}">
+              <a16:creationId xmlns:a16="http://schemas.microsoft.com/office/drawing/2014/main" id="{62CB7213-2483-D66C-F008-A28C2ED51943}"/>
+            </a:ext>
+          </a:extLst>
+        </p:cNvPr>
+        <p:cNvGrpSpPr/>
+        <p:nvPr/>
+      </p:nvGrpSpPr>
+      <p:grpSpPr>
+        <a:xfrm>
+          <a:off x="0" y="0"/>
+          <a:ext cx="0" cy="0"/>
+          <a:chOff x="0" y="0"/>
+          <a:chExt cx="0" cy="0"/>
+        </a:xfrm>
+      </p:grpSpPr>
+      <p:sp>
+        <p:nvSpPr>
+          <p:cNvPr id="76" name="テキスト ボックス 75">
+            <a:extLst>
+              <a:ext uri="{FF2B5EF4-FFF2-40B4-BE49-F238E27FC236}">
+                <a16:creationId xmlns:a16="http://schemas.microsoft.com/office/drawing/2014/main" id="{0A003D31-0CB8-6658-908D-31F692BFDA9A}"/>
+              </a:ext>
+            </a:extLst>
+          </p:cNvPr>
+          <p:cNvSpPr txBox="1"/>
+          <p:nvPr/>
+        </p:nvSpPr>
+        <p:spPr>
+          <a:xfrm>
+            <a:off x="419100" y="266700"/>
+            <a:ext cx="4698722" cy="584775"/>
+          </a:xfrm>
+          <a:prstGeom prst="rect">
+            <a:avLst/>
+          </a:prstGeom>
+          <a:noFill/>
+        </p:spPr>
+        <p:txBody>
+          <a:bodyPr wrap="none" rtlCol="0">
+            <a:spAutoFit/>
+          </a:bodyPr>
+          <a:lstStyle/>
+          <a:p>
+            <a:r>
+              <a:rPr kumimoji="1" lang="ja-JP" altLang="en-US" sz="3200" b="1" u="sng" dirty="0"/>
+              <a:t>角度ではなく</a:t>
+            </a:r>
+            <a:r>
+              <a:rPr kumimoji="1" lang="en-US" altLang="ja-JP" sz="3200" b="1" u="sng" dirty="0"/>
+              <a:t>π</a:t>
+            </a:r>
+            <a:r>
+              <a:rPr kumimoji="1" lang="ja-JP" altLang="en-US" sz="3200" b="1" u="sng" dirty="0"/>
+              <a:t>を用いる</a:t>
+            </a:r>
+          </a:p>
+        </p:txBody>
+      </p:sp>
+      <mc:AlternateContent xmlns:mc="http://schemas.openxmlformats.org/markup-compatibility/2006" xmlns:p14="http://schemas.microsoft.com/office/powerpoint/2010/main">
+        <mc:Choice Requires="p14">
+          <p:contentPart p14:bwMode="auto" r:id="rId2">
+            <p14:nvContentPartPr>
+              <p14:cNvPr id="142" name="インク 141">
+                <a:extLst>
+                  <a:ext uri="{FF2B5EF4-FFF2-40B4-BE49-F238E27FC236}">
+                    <a16:creationId xmlns:a16="http://schemas.microsoft.com/office/drawing/2014/main" id="{BBEB6C22-0215-746D-1960-6BCEF00A1EB7}"/>
+                  </a:ext>
+                </a:extLst>
+              </p14:cNvPr>
+              <p14:cNvContentPartPr/>
+              <p14:nvPr/>
+            </p14:nvContentPartPr>
+            <p14:xfrm>
+              <a:off x="5263860" y="-1282660"/>
+              <a:ext cx="360" cy="360"/>
+            </p14:xfrm>
+          </p:contentPart>
+        </mc:Choice>
+        <mc:Fallback xmlns="">
+          <p:pic>
+            <p:nvPicPr>
+              <p:cNvPr id="142" name="インク 141">
+                <a:extLst>
+                  <a:ext uri="{FF2B5EF4-FFF2-40B4-BE49-F238E27FC236}">
+                    <a16:creationId xmlns:a16="http://schemas.microsoft.com/office/drawing/2014/main" id="{C625D120-465D-998A-2B42-DD7F00E92DBB}"/>
+                  </a:ext>
+                </a:extLst>
+              </p:cNvPr>
+              <p:cNvPicPr/>
+              <p:nvPr/>
+            </p:nvPicPr>
+            <p:blipFill>
+              <a:blip r:embed="rId3"/>
+              <a:stretch>
+                <a:fillRect/>
+              </a:stretch>
+            </p:blipFill>
+            <p:spPr>
+              <a:xfrm>
+                <a:off x="5257740" y="-1288780"/>
+                <a:ext cx="12600" cy="12600"/>
+              </a:xfrm>
+              <a:prstGeom prst="rect">
+                <a:avLst/>
+              </a:prstGeom>
+            </p:spPr>
+          </p:pic>
+        </mc:Fallback>
+      </mc:AlternateContent>
+      <mc:AlternateContent xmlns:mc="http://schemas.openxmlformats.org/markup-compatibility/2006" xmlns:p14="http://schemas.microsoft.com/office/powerpoint/2010/main">
+        <mc:Choice Requires="p14">
+          <p:contentPart p14:bwMode="auto" r:id="rId4">
+            <p14:nvContentPartPr>
+              <p14:cNvPr id="143" name="インク 142">
+                <a:extLst>
+                  <a:ext uri="{FF2B5EF4-FFF2-40B4-BE49-F238E27FC236}">
+                    <a16:creationId xmlns:a16="http://schemas.microsoft.com/office/drawing/2014/main" id="{35E73411-5436-8C84-2E3C-A895A5542223}"/>
+                  </a:ext>
+                </a:extLst>
+              </p14:cNvPr>
+              <p14:cNvContentPartPr/>
+              <p14:nvPr/>
+            </p14:nvContentPartPr>
+            <p14:xfrm>
+              <a:off x="4013220" y="-1150540"/>
+              <a:ext cx="360" cy="1440"/>
+            </p14:xfrm>
+          </p:contentPart>
+        </mc:Choice>
+        <mc:Fallback xmlns="">
+          <p:pic>
+            <p:nvPicPr>
+              <p:cNvPr id="143" name="インク 142">
+                <a:extLst>
+                  <a:ext uri="{FF2B5EF4-FFF2-40B4-BE49-F238E27FC236}">
+                    <a16:creationId xmlns:a16="http://schemas.microsoft.com/office/drawing/2014/main" id="{CD7A66BA-C2EF-AF89-FCF5-05B72C078DED}"/>
+                  </a:ext>
+                </a:extLst>
+              </p:cNvPr>
+              <p:cNvPicPr/>
+              <p:nvPr/>
+            </p:nvPicPr>
+            <p:blipFill>
+              <a:blip r:embed="rId5"/>
+              <a:stretch>
+                <a:fillRect/>
+              </a:stretch>
+            </p:blipFill>
+            <p:spPr>
+              <a:xfrm>
+                <a:off x="4007100" y="-1156660"/>
+                <a:ext cx="12600" cy="13680"/>
+              </a:xfrm>
+              <a:prstGeom prst="rect">
+                <a:avLst/>
+              </a:prstGeom>
+            </p:spPr>
+          </p:pic>
+        </mc:Fallback>
+      </mc:AlternateContent>
+      <mc:AlternateContent xmlns:mc="http://schemas.openxmlformats.org/markup-compatibility/2006" xmlns:p14="http://schemas.microsoft.com/office/powerpoint/2010/main">
+        <mc:Choice Requires="p14">
+          <p:contentPart p14:bwMode="auto" r:id="rId6">
+            <p14:nvContentPartPr>
+              <p14:cNvPr id="144" name="インク 143">
+                <a:extLst>
+                  <a:ext uri="{FF2B5EF4-FFF2-40B4-BE49-F238E27FC236}">
+                    <a16:creationId xmlns:a16="http://schemas.microsoft.com/office/drawing/2014/main" id="{55B01CD6-60D2-58DF-E1B3-4E96035F92D1}"/>
+                  </a:ext>
+                </a:extLst>
+              </p14:cNvPr>
+              <p14:cNvContentPartPr/>
+              <p14:nvPr/>
+            </p14:nvContentPartPr>
+            <p14:xfrm>
+              <a:off x="2952660" y="-819340"/>
+              <a:ext cx="360" cy="360"/>
+            </p14:xfrm>
+          </p:contentPart>
+        </mc:Choice>
+        <mc:Fallback xmlns="">
+          <p:pic>
+            <p:nvPicPr>
+              <p:cNvPr id="144" name="インク 143">
+                <a:extLst>
+                  <a:ext uri="{FF2B5EF4-FFF2-40B4-BE49-F238E27FC236}">
+                    <a16:creationId xmlns:a16="http://schemas.microsoft.com/office/drawing/2014/main" id="{1FD7926E-3502-E95A-7C59-83B2295FE697}"/>
+                  </a:ext>
+                </a:extLst>
+              </p:cNvPr>
+              <p:cNvPicPr/>
+              <p:nvPr/>
+            </p:nvPicPr>
+            <p:blipFill>
+              <a:blip r:embed="rId3"/>
+              <a:stretch>
+                <a:fillRect/>
+              </a:stretch>
+            </p:blipFill>
+            <p:spPr>
+              <a:xfrm>
+                <a:off x="2946540" y="-825460"/>
+                <a:ext cx="12600" cy="12600"/>
+              </a:xfrm>
+              <a:prstGeom prst="rect">
+                <a:avLst/>
+              </a:prstGeom>
+            </p:spPr>
+          </p:pic>
+        </mc:Fallback>
+      </mc:AlternateContent>
+      <mc:AlternateContent xmlns:mc="http://schemas.openxmlformats.org/markup-compatibility/2006" xmlns:p14="http://schemas.microsoft.com/office/powerpoint/2010/main">
+        <mc:Choice Requires="p14">
+          <p:contentPart p14:bwMode="auto" r:id="rId7">
+            <p14:nvContentPartPr>
+              <p14:cNvPr id="145" name="インク 144">
+                <a:extLst>
+                  <a:ext uri="{FF2B5EF4-FFF2-40B4-BE49-F238E27FC236}">
+                    <a16:creationId xmlns:a16="http://schemas.microsoft.com/office/drawing/2014/main" id="{684906BD-BCC6-43F4-210D-DBE90160764F}"/>
+                  </a:ext>
+                </a:extLst>
+              </p14:cNvPr>
+              <p14:cNvContentPartPr/>
+              <p14:nvPr/>
+            </p14:nvContentPartPr>
+            <p14:xfrm>
+              <a:off x="3771660" y="-133540"/>
+              <a:ext cx="360" cy="360"/>
+            </p14:xfrm>
+          </p:contentPart>
+        </mc:Choice>
+        <mc:Fallback xmlns="">
+          <p:pic>
+            <p:nvPicPr>
+              <p:cNvPr id="145" name="インク 144">
+                <a:extLst>
+                  <a:ext uri="{FF2B5EF4-FFF2-40B4-BE49-F238E27FC236}">
+                    <a16:creationId xmlns:a16="http://schemas.microsoft.com/office/drawing/2014/main" id="{B9D8F04B-C1EB-720A-152D-361E1D09028E}"/>
+                  </a:ext>
+                </a:extLst>
+              </p:cNvPr>
+              <p:cNvPicPr/>
+              <p:nvPr/>
+            </p:nvPicPr>
+            <p:blipFill>
+              <a:blip r:embed="rId3"/>
+              <a:stretch>
+                <a:fillRect/>
+              </a:stretch>
+            </p:blipFill>
+            <p:spPr>
+              <a:xfrm>
+                <a:off x="3765540" y="-139660"/>
+                <a:ext cx="12600" cy="12600"/>
+              </a:xfrm>
+              <a:prstGeom prst="rect">
+                <a:avLst/>
+              </a:prstGeom>
+            </p:spPr>
+          </p:pic>
+        </mc:Fallback>
+      </mc:AlternateContent>
+      <p:pic>
+        <p:nvPicPr>
+          <p:cNvPr id="3" name="図 2">
+            <a:extLst>
+              <a:ext uri="{FF2B5EF4-FFF2-40B4-BE49-F238E27FC236}">
+                <a16:creationId xmlns:a16="http://schemas.microsoft.com/office/drawing/2014/main" id="{64BD14F1-1A41-75B6-5710-BC2E5EC1D598}"/>
+              </a:ext>
+            </a:extLst>
+          </p:cNvPr>
+          <p:cNvPicPr>
+            <a:picLocks noChangeAspect="1"/>
+          </p:cNvPicPr>
+          <p:nvPr/>
+        </p:nvPicPr>
+        <p:blipFill>
+          <a:blip r:embed="rId8">
+            <a:extLst>
+              <a:ext uri="{28A0092B-C50C-407E-A947-70E740481C1C}">
+                <a14:useLocalDpi xmlns:a14="http://schemas.microsoft.com/office/drawing/2010/main" val="0"/>
+              </a:ext>
+            </a:extLst>
+          </a:blip>
+          <a:stretch>
+            <a:fillRect/>
+          </a:stretch>
+        </p:blipFill>
+        <p:spPr>
+          <a:xfrm>
+            <a:off x="2534694" y="1058029"/>
+            <a:ext cx="7122610" cy="2684890"/>
+          </a:xfrm>
+          <a:prstGeom prst="rect">
+            <a:avLst/>
+          </a:prstGeom>
+        </p:spPr>
+      </p:pic>
+      <p:pic>
+        <p:nvPicPr>
+          <p:cNvPr id="9" name="図 8">
+            <a:extLst>
+              <a:ext uri="{FF2B5EF4-FFF2-40B4-BE49-F238E27FC236}">
+                <a16:creationId xmlns:a16="http://schemas.microsoft.com/office/drawing/2014/main" id="{0864B240-C539-C44B-ADEF-1C2F995C831E}"/>
+              </a:ext>
+            </a:extLst>
+          </p:cNvPr>
+          <p:cNvPicPr>
+            <a:picLocks noChangeAspect="1"/>
+          </p:cNvPicPr>
+          <p:nvPr/>
+        </p:nvPicPr>
+        <p:blipFill>
+          <a:blip r:embed="rId9">
+            <a:extLst>
+              <a:ext uri="{28A0092B-C50C-407E-A947-70E740481C1C}">
+                <a14:useLocalDpi xmlns:a14="http://schemas.microsoft.com/office/drawing/2010/main" val="0"/>
+              </a:ext>
+            </a:extLst>
+          </a:blip>
+          <a:stretch>
+            <a:fillRect/>
+          </a:stretch>
+        </p:blipFill>
+        <p:spPr>
+          <a:xfrm>
+            <a:off x="2231878" y="3321277"/>
+            <a:ext cx="7961993" cy="3403600"/>
+          </a:xfrm>
+          <a:prstGeom prst="rect">
+            <a:avLst/>
+          </a:prstGeom>
+        </p:spPr>
+      </p:pic>
+    </p:spTree>
+    <p:extLst>
+      <p:ext uri="{BB962C8B-B14F-4D97-AF65-F5344CB8AC3E}">
+        <p14:creationId xmlns:p14="http://schemas.microsoft.com/office/powerpoint/2010/main" val="4135671268"/>
+      </p:ext>
+    </p:extLst>
+  </p:cSld>
+  <p:clrMapOvr>
+    <a:masterClrMapping/>
+  </p:clrMapOvr>
+</p:sld>
+</file>
+
+<file path=ppt/slides/slide11.xml><?xml version="1.0" encoding="utf-8"?>
 <p:sld xmlns:a="http://schemas.openxmlformats.org/drawingml/2006/main" xmlns:r="http://schemas.openxmlformats.org/officeDocument/2006/relationships" xmlns:p="http://schemas.openxmlformats.org/presentationml/2006/main">
   <p:cSld>
     <p:spTree>
@@ -9260,7 +10041,7 @@
 </p:sld>
 </file>
 
-<file path=ppt/slides/slide11.xml><?xml version="1.0" encoding="utf-8"?>
+<file path=ppt/slides/slide12.xml><?xml version="1.0" encoding="utf-8"?>
 <p:sld xmlns:a="http://schemas.openxmlformats.org/drawingml/2006/main" xmlns:r="http://schemas.openxmlformats.org/officeDocument/2006/relationships" xmlns:p="http://schemas.openxmlformats.org/presentationml/2006/main">
   <p:cSld>
     <p:spTree>
@@ -10239,7 +11020,7 @@
 </p:sld>
 </file>
 
-<file path=ppt/slides/slide12.xml><?xml version="1.0" encoding="utf-8"?>
+<file path=ppt/slides/slide13.xml><?xml version="1.0" encoding="utf-8"?>
 <p:sld xmlns:a="http://schemas.openxmlformats.org/drawingml/2006/main" xmlns:r="http://schemas.openxmlformats.org/officeDocument/2006/relationships" xmlns:p="http://schemas.openxmlformats.org/presentationml/2006/main">
   <p:cSld>
     <p:spTree>
@@ -11904,8 +12685,8 @@
         </p:nvSpPr>
         <p:spPr>
           <a:xfrm>
-            <a:off x="519197" y="2943150"/>
-            <a:ext cx="2986395" cy="276999"/>
+            <a:off x="506180" y="2710235"/>
+            <a:ext cx="2459328" cy="584775"/>
           </a:xfrm>
           <a:prstGeom prst="rect">
             <a:avLst/>
@@ -11919,83 +12700,82 @@
           <a:lstStyle/>
           <a:p>
             <a:r>
-              <a:rPr lang="ja-JP" altLang="en-US" sz="1200" spc="-15" dirty="0">
+              <a:rPr lang="ja-JP" altLang="en-US" sz="1600" spc="-15" dirty="0">
                 <a:latin typeface="ＭＳ 明朝"/>
                 <a:cs typeface="ＭＳ 明朝"/>
               </a:rPr>
               <a:t>右図の，</a:t>
             </a:r>
             <a:r>
-              <a:rPr lang="en-US" altLang="ja-JP" sz="1200" spc="-10" dirty="0" err="1">
+              <a:rPr lang="en-US" altLang="ja-JP" sz="1600" spc="-10" dirty="0" err="1">
                 <a:latin typeface="Times New Roman"/>
                 <a:cs typeface="Times New Roman"/>
               </a:rPr>
               <a:t>sin</a:t>
             </a:r>
             <a:r>
-              <a:rPr lang="en-US" altLang="ja-JP" sz="1200" i="1" spc="-10" dirty="0" err="1">
+              <a:rPr lang="en-US" altLang="ja-JP" sz="1600" i="1" spc="-10" dirty="0" err="1">
                 <a:latin typeface="Times New Roman"/>
                 <a:cs typeface="Times New Roman"/>
               </a:rPr>
               <a:t>θ</a:t>
             </a:r>
             <a:r>
-              <a:rPr lang="ja-JP" altLang="en-US" sz="1200" spc="-10" dirty="0">
+              <a:rPr lang="ja-JP" altLang="en-US" sz="1600" spc="-10" dirty="0">
                 <a:latin typeface="ＭＳ 明朝"/>
                 <a:cs typeface="ＭＳ 明朝"/>
               </a:rPr>
               <a:t>，</a:t>
             </a:r>
             <a:r>
-              <a:rPr lang="en-US" altLang="ja-JP" sz="1200" spc="-10" dirty="0" err="1">
+              <a:rPr lang="en-US" altLang="ja-JP" sz="1600" spc="-10" dirty="0" err="1">
                 <a:latin typeface="Times New Roman"/>
                 <a:cs typeface="Times New Roman"/>
               </a:rPr>
               <a:t>cos</a:t>
             </a:r>
             <a:r>
-              <a:rPr lang="en-US" altLang="ja-JP" sz="1200" i="1" spc="-10" dirty="0" err="1">
+              <a:rPr lang="en-US" altLang="ja-JP" sz="1600" i="1" spc="-10" dirty="0" err="1">
                 <a:latin typeface="Times New Roman"/>
                 <a:cs typeface="Times New Roman"/>
               </a:rPr>
               <a:t>θ</a:t>
             </a:r>
             <a:r>
-              <a:rPr lang="ja-JP" altLang="en-US" sz="1200" spc="-10" dirty="0">
+              <a:rPr lang="ja-JP" altLang="en-US" sz="1600" spc="-10" dirty="0">
                 <a:latin typeface="ＭＳ 明朝"/>
                 <a:cs typeface="ＭＳ 明朝"/>
               </a:rPr>
               <a:t>，</a:t>
             </a:r>
             <a:r>
-              <a:rPr lang="en-US" altLang="ja-JP" sz="1200" spc="-10" dirty="0" err="1">
+              <a:rPr lang="en-US" altLang="ja-JP" sz="1600" spc="-10" dirty="0" err="1">
                 <a:latin typeface="Times New Roman"/>
                 <a:cs typeface="Times New Roman"/>
               </a:rPr>
               <a:t>tan</a:t>
             </a:r>
             <a:r>
-              <a:rPr lang="en-US" altLang="ja-JP" sz="1200" i="1" spc="-10" dirty="0" err="1">
+              <a:rPr lang="en-US" altLang="ja-JP" sz="1600" i="1" spc="-10" dirty="0" err="1">
                 <a:latin typeface="Times New Roman"/>
                 <a:cs typeface="Times New Roman"/>
               </a:rPr>
               <a:t>θ</a:t>
             </a:r>
-            <a:r>
-              <a:rPr lang="ja-JP" altLang="en-US" sz="1200" i="1" spc="50" dirty="0">
-                <a:latin typeface="Times New Roman"/>
-                <a:cs typeface="Times New Roman"/>
-              </a:rPr>
-              <a:t> </a:t>
-            </a:r>
-            <a:r>
-              <a:rPr lang="ja-JP" altLang="en-US" sz="1200" spc="-20" dirty="0">
+            <a:endParaRPr lang="en-US" altLang="ja-JP" sz="1600" i="1" spc="-10" dirty="0">
+              <a:latin typeface="Times New Roman"/>
+              <a:cs typeface="Times New Roman"/>
+            </a:endParaRPr>
+          </a:p>
+          <a:p>
+            <a:r>
+              <a:rPr lang="ja-JP" altLang="en-US" sz="1600" spc="-20" dirty="0">
                 <a:latin typeface="ＭＳ 明朝"/>
                 <a:cs typeface="ＭＳ 明朝"/>
               </a:rPr>
               <a:t>の値を求めよ。</a:t>
             </a:r>
-            <a:endParaRPr kumimoji="1" lang="ja-JP" altLang="en-US" sz="1200" dirty="0"/>
+            <a:endParaRPr kumimoji="1" lang="ja-JP" altLang="en-US" sz="1600" dirty="0"/>
           </a:p>
         </p:txBody>
       </p:sp>
@@ -13133,10 +13913,10 @@
       </p:sp>
       <p:sp>
         <p:nvSpPr>
-          <p:cNvPr id="224" name="テキスト ボックス 223">
+          <p:cNvPr id="2" name="テキスト ボックス 1">
             <a:extLst>
               <a:ext uri="{FF2B5EF4-FFF2-40B4-BE49-F238E27FC236}">
-                <a16:creationId xmlns:a16="http://schemas.microsoft.com/office/drawing/2014/main" id="{DBF243B6-0C8D-CE70-FB7D-A4521ABDDFFC}"/>
+                <a16:creationId xmlns:a16="http://schemas.microsoft.com/office/drawing/2014/main" id="{4B3067C1-19A8-35C2-79A6-08B26BBA8F78}"/>
               </a:ext>
             </a:extLst>
           </p:cNvPr>
@@ -13145,8 +13925,8 @@
         </p:nvSpPr>
         <p:spPr>
           <a:xfrm>
-            <a:off x="526127" y="4836413"/>
-            <a:ext cx="2986395" cy="276999"/>
+            <a:off x="531453" y="4651513"/>
+            <a:ext cx="2459328" cy="584775"/>
           </a:xfrm>
           <a:prstGeom prst="rect">
             <a:avLst/>
@@ -13160,83 +13940,82 @@
           <a:lstStyle/>
           <a:p>
             <a:r>
-              <a:rPr lang="ja-JP" altLang="en-US" sz="1200" spc="-15" dirty="0">
+              <a:rPr lang="ja-JP" altLang="en-US" sz="1600" spc="-15" dirty="0">
                 <a:latin typeface="ＭＳ 明朝"/>
                 <a:cs typeface="ＭＳ 明朝"/>
               </a:rPr>
               <a:t>右図の，</a:t>
             </a:r>
             <a:r>
-              <a:rPr lang="en-US" altLang="ja-JP" sz="1200" spc="-10" dirty="0" err="1">
+              <a:rPr lang="en-US" altLang="ja-JP" sz="1600" spc="-10" dirty="0" err="1">
                 <a:latin typeface="Times New Roman"/>
                 <a:cs typeface="Times New Roman"/>
               </a:rPr>
               <a:t>sin</a:t>
             </a:r>
             <a:r>
-              <a:rPr lang="en-US" altLang="ja-JP" sz="1200" i="1" spc="-10" dirty="0" err="1">
+              <a:rPr lang="en-US" altLang="ja-JP" sz="1600" i="1" spc="-10" dirty="0" err="1">
                 <a:latin typeface="Times New Roman"/>
                 <a:cs typeface="Times New Roman"/>
               </a:rPr>
               <a:t>θ</a:t>
             </a:r>
             <a:r>
-              <a:rPr lang="ja-JP" altLang="en-US" sz="1200" spc="-10" dirty="0">
+              <a:rPr lang="ja-JP" altLang="en-US" sz="1600" spc="-10" dirty="0">
                 <a:latin typeface="ＭＳ 明朝"/>
                 <a:cs typeface="ＭＳ 明朝"/>
               </a:rPr>
               <a:t>，</a:t>
             </a:r>
             <a:r>
-              <a:rPr lang="en-US" altLang="ja-JP" sz="1200" spc="-10" dirty="0" err="1">
+              <a:rPr lang="en-US" altLang="ja-JP" sz="1600" spc="-10" dirty="0" err="1">
                 <a:latin typeface="Times New Roman"/>
                 <a:cs typeface="Times New Roman"/>
               </a:rPr>
               <a:t>cos</a:t>
             </a:r>
             <a:r>
-              <a:rPr lang="en-US" altLang="ja-JP" sz="1200" i="1" spc="-10" dirty="0" err="1">
+              <a:rPr lang="en-US" altLang="ja-JP" sz="1600" i="1" spc="-10" dirty="0" err="1">
                 <a:latin typeface="Times New Roman"/>
                 <a:cs typeface="Times New Roman"/>
               </a:rPr>
               <a:t>θ</a:t>
             </a:r>
             <a:r>
-              <a:rPr lang="ja-JP" altLang="en-US" sz="1200" spc="-10" dirty="0">
+              <a:rPr lang="ja-JP" altLang="en-US" sz="1600" spc="-10" dirty="0">
                 <a:latin typeface="ＭＳ 明朝"/>
                 <a:cs typeface="ＭＳ 明朝"/>
               </a:rPr>
               <a:t>，</a:t>
             </a:r>
             <a:r>
-              <a:rPr lang="en-US" altLang="ja-JP" sz="1200" spc="-10" dirty="0" err="1">
+              <a:rPr lang="en-US" altLang="ja-JP" sz="1600" spc="-10" dirty="0" err="1">
                 <a:latin typeface="Times New Roman"/>
                 <a:cs typeface="Times New Roman"/>
               </a:rPr>
               <a:t>tan</a:t>
             </a:r>
             <a:r>
-              <a:rPr lang="en-US" altLang="ja-JP" sz="1200" i="1" spc="-10" dirty="0" err="1">
+              <a:rPr lang="en-US" altLang="ja-JP" sz="1600" i="1" spc="-10" dirty="0" err="1">
                 <a:latin typeface="Times New Roman"/>
                 <a:cs typeface="Times New Roman"/>
               </a:rPr>
               <a:t>θ</a:t>
             </a:r>
-            <a:r>
-              <a:rPr lang="ja-JP" altLang="en-US" sz="1200" i="1" spc="50" dirty="0">
-                <a:latin typeface="Times New Roman"/>
-                <a:cs typeface="Times New Roman"/>
-              </a:rPr>
-              <a:t> </a:t>
-            </a:r>
-            <a:r>
-              <a:rPr lang="ja-JP" altLang="en-US" sz="1200" spc="-20" dirty="0">
+            <a:endParaRPr lang="en-US" altLang="ja-JP" sz="1600" i="1" spc="-10" dirty="0">
+              <a:latin typeface="Times New Roman"/>
+              <a:cs typeface="Times New Roman"/>
+            </a:endParaRPr>
+          </a:p>
+          <a:p>
+            <a:r>
+              <a:rPr lang="ja-JP" altLang="en-US" sz="1600" spc="-20" dirty="0">
                 <a:latin typeface="ＭＳ 明朝"/>
                 <a:cs typeface="ＭＳ 明朝"/>
               </a:rPr>
               <a:t>の値を求めよ。</a:t>
             </a:r>
-            <a:endParaRPr kumimoji="1" lang="ja-JP" altLang="en-US" sz="1200" dirty="0"/>
+            <a:endParaRPr kumimoji="1" lang="ja-JP" altLang="en-US" sz="1600" dirty="0"/>
           </a:p>
         </p:txBody>
       </p:sp>
@@ -13254,6 +14033,461 @@
 </file>
 
 <file path=ppt/slides/slide2.xml><?xml version="1.0" encoding="utf-8"?>
+<p:sld xmlns:a="http://schemas.openxmlformats.org/drawingml/2006/main" xmlns:r="http://schemas.openxmlformats.org/officeDocument/2006/relationships" xmlns:p="http://schemas.openxmlformats.org/presentationml/2006/main">
+  <p:cSld>
+    <p:spTree>
+      <p:nvGrpSpPr>
+        <p:cNvPr id="1" name="Shape 91"/>
+        <p:cNvGrpSpPr/>
+        <p:nvPr/>
+      </p:nvGrpSpPr>
+      <p:grpSpPr>
+        <a:xfrm>
+          <a:off x="0" y="0"/>
+          <a:ext cx="0" cy="0"/>
+          <a:chOff x="0" y="0"/>
+          <a:chExt cx="0" cy="0"/>
+        </a:xfrm>
+      </p:grpSpPr>
+      <p:pic>
+        <p:nvPicPr>
+          <p:cNvPr id="93" name="Google Shape;93;p14" descr="image.png"/>
+          <p:cNvPicPr preferRelativeResize="0"/>
+          <p:nvPr/>
+        </p:nvPicPr>
+        <p:blipFill rotWithShape="1">
+          <a:blip r:embed="rId3">
+            <a:alphaModFix/>
+          </a:blip>
+          <a:srcRect/>
+          <a:stretch/>
+        </p:blipFill>
+        <p:spPr>
+          <a:xfrm>
+            <a:off x="1047750" y="1819275"/>
+            <a:ext cx="4286250" cy="4286250"/>
+          </a:xfrm>
+          <a:prstGeom prst="rect">
+            <a:avLst/>
+          </a:prstGeom>
+          <a:noFill/>
+          <a:ln>
+            <a:noFill/>
+          </a:ln>
+        </p:spPr>
+      </p:pic>
+      <p:pic>
+        <p:nvPicPr>
+          <p:cNvPr id="94" name="Google Shape;94;p14" descr="image.png"/>
+          <p:cNvPicPr preferRelativeResize="0"/>
+          <p:nvPr/>
+        </p:nvPicPr>
+        <p:blipFill rotWithShape="1">
+          <a:blip r:embed="rId4">
+            <a:alphaModFix/>
+          </a:blip>
+          <a:srcRect/>
+          <a:stretch/>
+        </p:blipFill>
+        <p:spPr>
+          <a:xfrm>
+            <a:off x="1057275" y="1828800"/>
+            <a:ext cx="4267200" cy="4267200"/>
+          </a:xfrm>
+          <a:prstGeom prst="rect">
+            <a:avLst/>
+          </a:prstGeom>
+          <a:noFill/>
+          <a:ln>
+            <a:noFill/>
+          </a:ln>
+        </p:spPr>
+      </p:pic>
+      <p:sp>
+        <p:nvSpPr>
+          <p:cNvPr id="95" name="Google Shape;95;p14"/>
+          <p:cNvSpPr txBox="1"/>
+          <p:nvPr/>
+        </p:nvSpPr>
+        <p:spPr>
+          <a:xfrm>
+            <a:off x="5915690" y="1603831"/>
+            <a:ext cx="5500687" cy="430887"/>
+          </a:xfrm>
+          <a:prstGeom prst="rect">
+            <a:avLst/>
+          </a:prstGeom>
+          <a:noFill/>
+          <a:ln>
+            <a:noFill/>
+          </a:ln>
+        </p:spPr>
+        <p:txBody>
+          <a:bodyPr spcFirstLastPara="1" wrap="square" lIns="0" tIns="0" rIns="0" bIns="0" anchor="t" anchorCtr="0">
+            <a:spAutoFit/>
+          </a:bodyPr>
+          <a:lstStyle/>
+          <a:p>
+            <a:r>
+              <a:rPr lang="ja-JP" altLang="en-US" sz="2800" b="1" dirty="0">
+                <a:solidFill>
+                  <a:srgbClr val="0F172A"/>
+                </a:solidFill>
+                <a:latin typeface="Poppins"/>
+                <a:ea typeface="Poppins"/>
+                <a:cs typeface="Poppins"/>
+                <a:sym typeface="Poppins"/>
+              </a:rPr>
+              <a:t>「角度」の基礎</a:t>
+            </a:r>
+            <a:endParaRPr lang="ja-JP" altLang="en-US" sz="2800" dirty="0"/>
+          </a:p>
+        </p:txBody>
+      </p:sp>
+      <p:sp>
+        <p:nvSpPr>
+          <p:cNvPr id="96" name="Google Shape;96;p14"/>
+          <p:cNvSpPr txBox="1"/>
+          <p:nvPr/>
+        </p:nvSpPr>
+        <p:spPr>
+          <a:xfrm>
+            <a:off x="6046658" y="2381249"/>
+            <a:ext cx="5238750" cy="3490186"/>
+          </a:xfrm>
+          <a:prstGeom prst="rect">
+            <a:avLst/>
+          </a:prstGeom>
+          <a:noFill/>
+          <a:ln>
+            <a:noFill/>
+          </a:ln>
+        </p:spPr>
+        <p:txBody>
+          <a:bodyPr spcFirstLastPara="1" wrap="square" lIns="0" tIns="0" rIns="0" bIns="0" anchor="t" anchorCtr="0">
+            <a:spAutoFit/>
+          </a:bodyPr>
+          <a:lstStyle/>
+          <a:p>
+            <a:pPr>
+              <a:lnSpc>
+                <a:spcPct val="140000"/>
+              </a:lnSpc>
+            </a:pPr>
+            <a:r>
+              <a:rPr lang="ja-JP" altLang="en-US" sz="1800" dirty="0">
+                <a:solidFill>
+                  <a:srgbClr val="475569"/>
+                </a:solidFill>
+                <a:latin typeface="Inter"/>
+                <a:ea typeface="Inter"/>
+                <a:cs typeface="Inter"/>
+                <a:sym typeface="Inter"/>
+              </a:rPr>
+              <a:t>この講義では、角度を考える上での基礎となる三角比に関して解説します。</a:t>
+            </a:r>
+            <a:br>
+              <a:rPr lang="ja-JP" altLang="en-US" sz="1800" dirty="0">
+                <a:solidFill>
+                  <a:srgbClr val="475569"/>
+                </a:solidFill>
+                <a:latin typeface="Inter"/>
+                <a:ea typeface="Inter"/>
+                <a:cs typeface="Inter"/>
+                <a:sym typeface="Inter"/>
+              </a:rPr>
+            </a:br>
+            <a:r>
+              <a:rPr lang="ja-JP" altLang="en-US" sz="1800" dirty="0">
+                <a:solidFill>
+                  <a:srgbClr val="475569"/>
+                </a:solidFill>
+                <a:latin typeface="Inter"/>
+                <a:ea typeface="Inter"/>
+                <a:cs typeface="Inter"/>
+                <a:sym typeface="Inter"/>
+              </a:rPr>
+              <a:t>度や</a:t>
+            </a:r>
+            <a:r>
+              <a:rPr lang="en-US" altLang="ja-JP" sz="1800" dirty="0">
+                <a:solidFill>
+                  <a:srgbClr val="475569"/>
+                </a:solidFill>
+                <a:latin typeface="Inter"/>
+                <a:ea typeface="Inter"/>
+                <a:cs typeface="Inter"/>
+                <a:sym typeface="Inter"/>
+              </a:rPr>
+              <a:t>[rad]</a:t>
+            </a:r>
+            <a:r>
+              <a:rPr lang="ja-JP" altLang="en-US" sz="1800" dirty="0">
+                <a:solidFill>
+                  <a:srgbClr val="475569"/>
+                </a:solidFill>
+                <a:latin typeface="Inter"/>
+                <a:ea typeface="Inter"/>
+                <a:cs typeface="Inter"/>
+                <a:sym typeface="Inter"/>
+              </a:rPr>
+              <a:t>は傾きを表すものであり、それを拡張して回転なども考えることとなります。</a:t>
+            </a:r>
+            <a:br>
+              <a:rPr lang="ja-JP" altLang="en-US" sz="1800" dirty="0">
+                <a:solidFill>
+                  <a:srgbClr val="475569"/>
+                </a:solidFill>
+                <a:latin typeface="Inter"/>
+                <a:ea typeface="Inter"/>
+                <a:cs typeface="Inter"/>
+                <a:sym typeface="Inter"/>
+              </a:rPr>
+            </a:br>
+            <a:r>
+              <a:rPr lang="ja-JP" altLang="en-US" sz="1800" dirty="0">
+                <a:solidFill>
+                  <a:srgbClr val="475569"/>
+                </a:solidFill>
+                <a:latin typeface="Inter"/>
+                <a:ea typeface="Inter"/>
+                <a:cs typeface="Inter"/>
+                <a:sym typeface="Inter"/>
+              </a:rPr>
+              <a:t>物体の運動を考える際に</a:t>
+            </a:r>
+            <a:r>
+              <a:rPr lang="en-US" altLang="ja-JP" sz="1800" dirty="0">
+                <a:solidFill>
+                  <a:srgbClr val="475569"/>
+                </a:solidFill>
+                <a:latin typeface="Inter"/>
+                <a:ea typeface="Inter"/>
+                <a:cs typeface="Inter"/>
+                <a:sym typeface="Inter"/>
+              </a:rPr>
+              <a:t>『</a:t>
+            </a:r>
+            <a:r>
+              <a:rPr lang="ja-JP" altLang="en-US" sz="1800" dirty="0">
+                <a:solidFill>
+                  <a:srgbClr val="475569"/>
+                </a:solidFill>
+                <a:latin typeface="Inter"/>
+                <a:ea typeface="Inter"/>
+                <a:cs typeface="Inter"/>
+                <a:sym typeface="Inter"/>
+              </a:rPr>
+              <a:t>どれほど傾いているか</a:t>
+            </a:r>
+            <a:r>
+              <a:rPr lang="en-US" altLang="ja-JP" sz="1800" dirty="0">
+                <a:solidFill>
+                  <a:srgbClr val="475569"/>
+                </a:solidFill>
+                <a:latin typeface="Inter"/>
+                <a:ea typeface="Inter"/>
+                <a:cs typeface="Inter"/>
+                <a:sym typeface="Inter"/>
+              </a:rPr>
+              <a:t>』</a:t>
+            </a:r>
+          </a:p>
+          <a:p>
+            <a:pPr>
+              <a:lnSpc>
+                <a:spcPct val="140000"/>
+              </a:lnSpc>
+            </a:pPr>
+            <a:r>
+              <a:rPr lang="ja-JP" altLang="en-US" sz="1800" dirty="0">
+                <a:solidFill>
+                  <a:srgbClr val="475569"/>
+                </a:solidFill>
+                <a:latin typeface="Inter"/>
+                <a:ea typeface="Inter"/>
+                <a:cs typeface="Inter"/>
+                <a:sym typeface="Inter"/>
+              </a:rPr>
+              <a:t>または</a:t>
+            </a:r>
+            <a:r>
+              <a:rPr lang="en-US" altLang="ja-JP" sz="1800" dirty="0">
+                <a:solidFill>
+                  <a:srgbClr val="475569"/>
+                </a:solidFill>
+                <a:latin typeface="Inter"/>
+                <a:ea typeface="Inter"/>
+                <a:cs typeface="Inter"/>
+                <a:sym typeface="Inter"/>
+              </a:rPr>
+              <a:t>『</a:t>
+            </a:r>
+            <a:r>
+              <a:rPr lang="ja-JP" altLang="en-US" sz="1800" dirty="0">
+                <a:solidFill>
+                  <a:srgbClr val="475569"/>
+                </a:solidFill>
+                <a:latin typeface="Inter"/>
+                <a:ea typeface="Inter"/>
+                <a:cs typeface="Inter"/>
+                <a:sym typeface="Inter"/>
+              </a:rPr>
+              <a:t>どのように回転しているか</a:t>
+            </a:r>
+            <a:r>
+              <a:rPr lang="en-US" altLang="ja-JP" sz="1800" dirty="0">
+                <a:solidFill>
+                  <a:srgbClr val="475569"/>
+                </a:solidFill>
+                <a:latin typeface="Inter"/>
+                <a:ea typeface="Inter"/>
+                <a:cs typeface="Inter"/>
+                <a:sym typeface="Inter"/>
+              </a:rPr>
+              <a:t>』</a:t>
+            </a:r>
+            <a:r>
+              <a:rPr lang="ja-JP" altLang="en-US" sz="1800" dirty="0">
+                <a:solidFill>
+                  <a:srgbClr val="475569"/>
+                </a:solidFill>
+                <a:latin typeface="Inter"/>
+                <a:ea typeface="Inter"/>
+                <a:cs typeface="Inter"/>
+                <a:sym typeface="Inter"/>
+              </a:rPr>
+              <a:t>というのは絶対に必要です。</a:t>
+            </a:r>
+          </a:p>
+          <a:p>
+            <a:pPr>
+              <a:lnSpc>
+                <a:spcPct val="140000"/>
+              </a:lnSpc>
+            </a:pPr>
+            <a:r>
+              <a:rPr lang="ja-JP" altLang="en-US" sz="1800" dirty="0">
+                <a:solidFill>
+                  <a:srgbClr val="475569"/>
+                </a:solidFill>
+                <a:latin typeface="Inter"/>
+                <a:ea typeface="Inter"/>
+                <a:cs typeface="Inter"/>
+                <a:sym typeface="Inter"/>
+              </a:rPr>
+              <a:t>このあたりから躓いてしまう学生が増えますが、大事な部分なので必ず理解しましょう。</a:t>
+            </a:r>
+          </a:p>
+        </p:txBody>
+      </p:sp>
+      <p:sp>
+        <p:nvSpPr>
+          <p:cNvPr id="98" name="Google Shape;98;p14"/>
+          <p:cNvSpPr txBox="1"/>
+          <p:nvPr/>
+        </p:nvSpPr>
+        <p:spPr>
+          <a:xfrm>
+            <a:off x="762000" y="571500"/>
+            <a:ext cx="11401425" cy="685800"/>
+          </a:xfrm>
+          <a:prstGeom prst="rect">
+            <a:avLst/>
+          </a:prstGeom>
+          <a:noFill/>
+          <a:ln>
+            <a:noFill/>
+          </a:ln>
+        </p:spPr>
+        <p:txBody>
+          <a:bodyPr spcFirstLastPara="1" wrap="square" lIns="0" tIns="0" rIns="0" bIns="0" anchor="t" anchorCtr="0">
+            <a:spAutoFit/>
+          </a:bodyPr>
+          <a:lstStyle/>
+          <a:p>
+            <a:pPr marL="0" marR="0" lvl="0" indent="0" algn="l" rtl="0">
+              <a:spcBef>
+                <a:spcPts val="0"/>
+              </a:spcBef>
+              <a:spcAft>
+                <a:spcPts val="0"/>
+              </a:spcAft>
+              <a:buNone/>
+            </a:pPr>
+            <a:r>
+              <a:rPr lang="en-US" sz="3600" b="1" i="0" u="none" strike="noStrike" cap="none">
+                <a:solidFill>
+                  <a:srgbClr val="0F172A"/>
+                </a:solidFill>
+                <a:latin typeface="Poppins"/>
+                <a:ea typeface="Poppins"/>
+                <a:cs typeface="Poppins"/>
+                <a:sym typeface="Poppins"/>
+              </a:rPr>
+              <a:t>概要</a:t>
+            </a:r>
+            <a:endParaRPr/>
+          </a:p>
+        </p:txBody>
+      </p:sp>
+      <p:sp>
+        <p:nvSpPr>
+          <p:cNvPr id="99" name="Google Shape;99;p14"/>
+          <p:cNvSpPr/>
+          <p:nvPr/>
+        </p:nvSpPr>
+        <p:spPr>
+          <a:xfrm>
+            <a:off x="571500" y="571500"/>
+            <a:ext cx="95250" cy="685800"/>
+          </a:xfrm>
+          <a:prstGeom prst="rect">
+            <a:avLst/>
+          </a:prstGeom>
+          <a:solidFill>
+            <a:srgbClr val="3B82F6"/>
+          </a:solidFill>
+          <a:ln>
+            <a:noFill/>
+          </a:ln>
+        </p:spPr>
+        <p:txBody>
+          <a:bodyPr spcFirstLastPara="1" wrap="square" lIns="91425" tIns="45700" rIns="91425" bIns="45700" anchor="ctr" anchorCtr="0">
+            <a:noAutofit/>
+          </a:bodyPr>
+          <a:lstStyle/>
+          <a:p>
+            <a:pPr marL="0" marR="0" lvl="0" indent="0" algn="ctr" rtl="0">
+              <a:spcBef>
+                <a:spcPts val="0"/>
+              </a:spcBef>
+              <a:spcAft>
+                <a:spcPts val="0"/>
+              </a:spcAft>
+              <a:buNone/>
+            </a:pPr>
+            <a:endParaRPr sz="1800" b="0" i="0" u="none" strike="noStrike" cap="none">
+              <a:solidFill>
+                <a:schemeClr val="dk1"/>
+              </a:solidFill>
+              <a:latin typeface="Calibri"/>
+              <a:ea typeface="Calibri"/>
+              <a:cs typeface="Calibri"/>
+              <a:sym typeface="Calibri"/>
+            </a:endParaRPr>
+          </a:p>
+        </p:txBody>
+      </p:sp>
+    </p:spTree>
+  </p:cSld>
+  <p:clrMapOvr>
+    <a:masterClrMapping/>
+  </p:clrMapOvr>
+</p:sld>
+</file>
+
+<file path=ppt/slides/slide3.xml><?xml version="1.0" encoding="utf-8"?>
 <p:sld xmlns:a="http://schemas.openxmlformats.org/drawingml/2006/main" xmlns:r="http://schemas.openxmlformats.org/officeDocument/2006/relationships" xmlns:p="http://schemas.openxmlformats.org/presentationml/2006/main">
   <p:cSld>
     <p:spTree>
@@ -14640,7 +15874,7 @@
 </p:sld>
 </file>
 
-<file path=ppt/slides/slide3.xml><?xml version="1.0" encoding="utf-8"?>
+<file path=ppt/slides/slide4.xml><?xml version="1.0" encoding="utf-8"?>
 <p:sld xmlns:a="http://schemas.openxmlformats.org/drawingml/2006/main" xmlns:r="http://schemas.openxmlformats.org/officeDocument/2006/relationships" xmlns:p="http://schemas.openxmlformats.org/presentationml/2006/main">
   <p:cSld>
     <p:spTree>
@@ -17263,7 +18497,7 @@
 </p:sld>
 </file>
 
-<file path=ppt/slides/slide4.xml><?xml version="1.0" encoding="utf-8"?>
+<file path=ppt/slides/slide5.xml><?xml version="1.0" encoding="utf-8"?>
 <p:sld xmlns:a="http://schemas.openxmlformats.org/drawingml/2006/main" xmlns:r="http://schemas.openxmlformats.org/officeDocument/2006/relationships" xmlns:p="http://schemas.openxmlformats.org/presentationml/2006/main">
   <p:cSld>
     <p:spTree>
@@ -19832,7 +21066,7 @@
 </p:sld>
 </file>
 
-<file path=ppt/slides/slide5.xml><?xml version="1.0" encoding="utf-8"?>
+<file path=ppt/slides/slide6.xml><?xml version="1.0" encoding="utf-8"?>
 <p:sld xmlns:a="http://schemas.openxmlformats.org/drawingml/2006/main" xmlns:r="http://schemas.openxmlformats.org/officeDocument/2006/relationships" xmlns:p="http://schemas.openxmlformats.org/presentationml/2006/main">
   <p:cSld>
     <p:spTree>
@@ -20847,7 +22081,7 @@
 </p:sld>
 </file>
 
-<file path=ppt/slides/slide6.xml><?xml version="1.0" encoding="utf-8"?>
+<file path=ppt/slides/slide7.xml><?xml version="1.0" encoding="utf-8"?>
 <p:sld xmlns:a="http://schemas.openxmlformats.org/drawingml/2006/main" xmlns:r="http://schemas.openxmlformats.org/officeDocument/2006/relationships" xmlns:p="http://schemas.openxmlformats.org/presentationml/2006/main">
   <p:cSld>
     <p:spTree>
@@ -21811,7 +23045,7 @@
 </p:sld>
 </file>
 
-<file path=ppt/slides/slide7.xml><?xml version="1.0" encoding="utf-8"?>
+<file path=ppt/slides/slide8.xml><?xml version="1.0" encoding="utf-8"?>
 <p:sld xmlns:a="http://schemas.openxmlformats.org/drawingml/2006/main" xmlns:r="http://schemas.openxmlformats.org/officeDocument/2006/relationships" xmlns:p="http://schemas.openxmlformats.org/presentationml/2006/main">
   <p:cSld>
     <p:spTree>
@@ -24510,7 +25744,7 @@
 </p:sld>
 </file>
 
-<file path=ppt/slides/slide8.xml><?xml version="1.0" encoding="utf-8"?>
+<file path=ppt/slides/slide9.xml><?xml version="1.0" encoding="utf-8"?>
 <p:sld xmlns:a="http://schemas.openxmlformats.org/drawingml/2006/main" xmlns:r="http://schemas.openxmlformats.org/officeDocument/2006/relationships" xmlns:p="http://schemas.openxmlformats.org/presentationml/2006/main">
   <p:cSld>
     <p:spTree>
@@ -25407,361 +26641,6 @@
     <p:extLst>
       <p:ext uri="{BB962C8B-B14F-4D97-AF65-F5344CB8AC3E}">
         <p14:creationId xmlns:p14="http://schemas.microsoft.com/office/powerpoint/2010/main" val="1434635899"/>
-      </p:ext>
-    </p:extLst>
-  </p:cSld>
-  <p:clrMapOvr>
-    <a:masterClrMapping/>
-  </p:clrMapOvr>
-</p:sld>
-</file>
-
-<file path=ppt/slides/slide9.xml><?xml version="1.0" encoding="utf-8"?>
-<p:sld xmlns:a="http://schemas.openxmlformats.org/drawingml/2006/main" xmlns:r="http://schemas.openxmlformats.org/officeDocument/2006/relationships" xmlns:p="http://schemas.openxmlformats.org/presentationml/2006/main">
-  <p:cSld>
-    <p:spTree>
-      <p:nvGrpSpPr>
-        <p:cNvPr id="1" name="">
-          <a:extLst>
-            <a:ext uri="{FF2B5EF4-FFF2-40B4-BE49-F238E27FC236}">
-              <a16:creationId xmlns:a16="http://schemas.microsoft.com/office/drawing/2014/main" id="{62CB7213-2483-D66C-F008-A28C2ED51943}"/>
-            </a:ext>
-          </a:extLst>
-        </p:cNvPr>
-        <p:cNvGrpSpPr/>
-        <p:nvPr/>
-      </p:nvGrpSpPr>
-      <p:grpSpPr>
-        <a:xfrm>
-          <a:off x="0" y="0"/>
-          <a:ext cx="0" cy="0"/>
-          <a:chOff x="0" y="0"/>
-          <a:chExt cx="0" cy="0"/>
-        </a:xfrm>
-      </p:grpSpPr>
-      <p:sp>
-        <p:nvSpPr>
-          <p:cNvPr id="76" name="テキスト ボックス 75">
-            <a:extLst>
-              <a:ext uri="{FF2B5EF4-FFF2-40B4-BE49-F238E27FC236}">
-                <a16:creationId xmlns:a16="http://schemas.microsoft.com/office/drawing/2014/main" id="{0A003D31-0CB8-6658-908D-31F692BFDA9A}"/>
-              </a:ext>
-            </a:extLst>
-          </p:cNvPr>
-          <p:cNvSpPr txBox="1"/>
-          <p:nvPr/>
-        </p:nvSpPr>
-        <p:spPr>
-          <a:xfrm>
-            <a:off x="419100" y="266700"/>
-            <a:ext cx="4698722" cy="584775"/>
-          </a:xfrm>
-          <a:prstGeom prst="rect">
-            <a:avLst/>
-          </a:prstGeom>
-          <a:noFill/>
-        </p:spPr>
-        <p:txBody>
-          <a:bodyPr wrap="none" rtlCol="0">
-            <a:spAutoFit/>
-          </a:bodyPr>
-          <a:lstStyle/>
-          <a:p>
-            <a:r>
-              <a:rPr kumimoji="1" lang="ja-JP" altLang="en-US" sz="3200" b="1" u="sng" dirty="0"/>
-              <a:t>角度ではなく</a:t>
-            </a:r>
-            <a:r>
-              <a:rPr kumimoji="1" lang="en-US" altLang="ja-JP" sz="3200" b="1" u="sng" dirty="0"/>
-              <a:t>π</a:t>
-            </a:r>
-            <a:r>
-              <a:rPr kumimoji="1" lang="ja-JP" altLang="en-US" sz="3200" b="1" u="sng" dirty="0"/>
-              <a:t>を用いる</a:t>
-            </a:r>
-          </a:p>
-        </p:txBody>
-      </p:sp>
-      <mc:AlternateContent xmlns:mc="http://schemas.openxmlformats.org/markup-compatibility/2006" xmlns:p14="http://schemas.microsoft.com/office/powerpoint/2010/main">
-        <mc:Choice Requires="p14">
-          <p:contentPart p14:bwMode="auto" r:id="rId2">
-            <p14:nvContentPartPr>
-              <p14:cNvPr id="142" name="インク 141">
-                <a:extLst>
-                  <a:ext uri="{FF2B5EF4-FFF2-40B4-BE49-F238E27FC236}">
-                    <a16:creationId xmlns:a16="http://schemas.microsoft.com/office/drawing/2014/main" id="{BBEB6C22-0215-746D-1960-6BCEF00A1EB7}"/>
-                  </a:ext>
-                </a:extLst>
-              </p14:cNvPr>
-              <p14:cNvContentPartPr/>
-              <p14:nvPr/>
-            </p14:nvContentPartPr>
-            <p14:xfrm>
-              <a:off x="5263860" y="-1282660"/>
-              <a:ext cx="360" cy="360"/>
-            </p14:xfrm>
-          </p:contentPart>
-        </mc:Choice>
-        <mc:Fallback xmlns="">
-          <p:pic>
-            <p:nvPicPr>
-              <p:cNvPr id="142" name="インク 141">
-                <a:extLst>
-                  <a:ext uri="{FF2B5EF4-FFF2-40B4-BE49-F238E27FC236}">
-                    <a16:creationId xmlns:a16="http://schemas.microsoft.com/office/drawing/2014/main" id="{C625D120-465D-998A-2B42-DD7F00E92DBB}"/>
-                  </a:ext>
-                </a:extLst>
-              </p:cNvPr>
-              <p:cNvPicPr/>
-              <p:nvPr/>
-            </p:nvPicPr>
-            <p:blipFill>
-              <a:blip r:embed="rId3"/>
-              <a:stretch>
-                <a:fillRect/>
-              </a:stretch>
-            </p:blipFill>
-            <p:spPr>
-              <a:xfrm>
-                <a:off x="5257740" y="-1288780"/>
-                <a:ext cx="12600" cy="12600"/>
-              </a:xfrm>
-              <a:prstGeom prst="rect">
-                <a:avLst/>
-              </a:prstGeom>
-            </p:spPr>
-          </p:pic>
-        </mc:Fallback>
-      </mc:AlternateContent>
-      <mc:AlternateContent xmlns:mc="http://schemas.openxmlformats.org/markup-compatibility/2006" xmlns:p14="http://schemas.microsoft.com/office/powerpoint/2010/main">
-        <mc:Choice Requires="p14">
-          <p:contentPart p14:bwMode="auto" r:id="rId4">
-            <p14:nvContentPartPr>
-              <p14:cNvPr id="143" name="インク 142">
-                <a:extLst>
-                  <a:ext uri="{FF2B5EF4-FFF2-40B4-BE49-F238E27FC236}">
-                    <a16:creationId xmlns:a16="http://schemas.microsoft.com/office/drawing/2014/main" id="{35E73411-5436-8C84-2E3C-A895A5542223}"/>
-                  </a:ext>
-                </a:extLst>
-              </p14:cNvPr>
-              <p14:cNvContentPartPr/>
-              <p14:nvPr/>
-            </p14:nvContentPartPr>
-            <p14:xfrm>
-              <a:off x="4013220" y="-1150540"/>
-              <a:ext cx="360" cy="1440"/>
-            </p14:xfrm>
-          </p:contentPart>
-        </mc:Choice>
-        <mc:Fallback xmlns="">
-          <p:pic>
-            <p:nvPicPr>
-              <p:cNvPr id="143" name="インク 142">
-                <a:extLst>
-                  <a:ext uri="{FF2B5EF4-FFF2-40B4-BE49-F238E27FC236}">
-                    <a16:creationId xmlns:a16="http://schemas.microsoft.com/office/drawing/2014/main" id="{CD7A66BA-C2EF-AF89-FCF5-05B72C078DED}"/>
-                  </a:ext>
-                </a:extLst>
-              </p:cNvPr>
-              <p:cNvPicPr/>
-              <p:nvPr/>
-            </p:nvPicPr>
-            <p:blipFill>
-              <a:blip r:embed="rId5"/>
-              <a:stretch>
-                <a:fillRect/>
-              </a:stretch>
-            </p:blipFill>
-            <p:spPr>
-              <a:xfrm>
-                <a:off x="4007100" y="-1156660"/>
-                <a:ext cx="12600" cy="13680"/>
-              </a:xfrm>
-              <a:prstGeom prst="rect">
-                <a:avLst/>
-              </a:prstGeom>
-            </p:spPr>
-          </p:pic>
-        </mc:Fallback>
-      </mc:AlternateContent>
-      <mc:AlternateContent xmlns:mc="http://schemas.openxmlformats.org/markup-compatibility/2006" xmlns:p14="http://schemas.microsoft.com/office/powerpoint/2010/main">
-        <mc:Choice Requires="p14">
-          <p:contentPart p14:bwMode="auto" r:id="rId6">
-            <p14:nvContentPartPr>
-              <p14:cNvPr id="144" name="インク 143">
-                <a:extLst>
-                  <a:ext uri="{FF2B5EF4-FFF2-40B4-BE49-F238E27FC236}">
-                    <a16:creationId xmlns:a16="http://schemas.microsoft.com/office/drawing/2014/main" id="{55B01CD6-60D2-58DF-E1B3-4E96035F92D1}"/>
-                  </a:ext>
-                </a:extLst>
-              </p14:cNvPr>
-              <p14:cNvContentPartPr/>
-              <p14:nvPr/>
-            </p14:nvContentPartPr>
-            <p14:xfrm>
-              <a:off x="2952660" y="-819340"/>
-              <a:ext cx="360" cy="360"/>
-            </p14:xfrm>
-          </p:contentPart>
-        </mc:Choice>
-        <mc:Fallback xmlns="">
-          <p:pic>
-            <p:nvPicPr>
-              <p:cNvPr id="144" name="インク 143">
-                <a:extLst>
-                  <a:ext uri="{FF2B5EF4-FFF2-40B4-BE49-F238E27FC236}">
-                    <a16:creationId xmlns:a16="http://schemas.microsoft.com/office/drawing/2014/main" id="{1FD7926E-3502-E95A-7C59-83B2295FE697}"/>
-                  </a:ext>
-                </a:extLst>
-              </p:cNvPr>
-              <p:cNvPicPr/>
-              <p:nvPr/>
-            </p:nvPicPr>
-            <p:blipFill>
-              <a:blip r:embed="rId3"/>
-              <a:stretch>
-                <a:fillRect/>
-              </a:stretch>
-            </p:blipFill>
-            <p:spPr>
-              <a:xfrm>
-                <a:off x="2946540" y="-825460"/>
-                <a:ext cx="12600" cy="12600"/>
-              </a:xfrm>
-              <a:prstGeom prst="rect">
-                <a:avLst/>
-              </a:prstGeom>
-            </p:spPr>
-          </p:pic>
-        </mc:Fallback>
-      </mc:AlternateContent>
-      <mc:AlternateContent xmlns:mc="http://schemas.openxmlformats.org/markup-compatibility/2006" xmlns:p14="http://schemas.microsoft.com/office/powerpoint/2010/main">
-        <mc:Choice Requires="p14">
-          <p:contentPart p14:bwMode="auto" r:id="rId7">
-            <p14:nvContentPartPr>
-              <p14:cNvPr id="145" name="インク 144">
-                <a:extLst>
-                  <a:ext uri="{FF2B5EF4-FFF2-40B4-BE49-F238E27FC236}">
-                    <a16:creationId xmlns:a16="http://schemas.microsoft.com/office/drawing/2014/main" id="{684906BD-BCC6-43F4-210D-DBE90160764F}"/>
-                  </a:ext>
-                </a:extLst>
-              </p14:cNvPr>
-              <p14:cNvContentPartPr/>
-              <p14:nvPr/>
-            </p14:nvContentPartPr>
-            <p14:xfrm>
-              <a:off x="3771660" y="-133540"/>
-              <a:ext cx="360" cy="360"/>
-            </p14:xfrm>
-          </p:contentPart>
-        </mc:Choice>
-        <mc:Fallback xmlns="">
-          <p:pic>
-            <p:nvPicPr>
-              <p:cNvPr id="145" name="インク 144">
-                <a:extLst>
-                  <a:ext uri="{FF2B5EF4-FFF2-40B4-BE49-F238E27FC236}">
-                    <a16:creationId xmlns:a16="http://schemas.microsoft.com/office/drawing/2014/main" id="{B9D8F04B-C1EB-720A-152D-361E1D09028E}"/>
-                  </a:ext>
-                </a:extLst>
-              </p:cNvPr>
-              <p:cNvPicPr/>
-              <p:nvPr/>
-            </p:nvPicPr>
-            <p:blipFill>
-              <a:blip r:embed="rId3"/>
-              <a:stretch>
-                <a:fillRect/>
-              </a:stretch>
-            </p:blipFill>
-            <p:spPr>
-              <a:xfrm>
-                <a:off x="3765540" y="-139660"/>
-                <a:ext cx="12600" cy="12600"/>
-              </a:xfrm>
-              <a:prstGeom prst="rect">
-                <a:avLst/>
-              </a:prstGeom>
-            </p:spPr>
-          </p:pic>
-        </mc:Fallback>
-      </mc:AlternateContent>
-      <p:pic>
-        <p:nvPicPr>
-          <p:cNvPr id="3" name="図 2">
-            <a:extLst>
-              <a:ext uri="{FF2B5EF4-FFF2-40B4-BE49-F238E27FC236}">
-                <a16:creationId xmlns:a16="http://schemas.microsoft.com/office/drawing/2014/main" id="{64BD14F1-1A41-75B6-5710-BC2E5EC1D598}"/>
-              </a:ext>
-            </a:extLst>
-          </p:cNvPr>
-          <p:cNvPicPr>
-            <a:picLocks noChangeAspect="1"/>
-          </p:cNvPicPr>
-          <p:nvPr/>
-        </p:nvPicPr>
-        <p:blipFill>
-          <a:blip r:embed="rId8">
-            <a:extLst>
-              <a:ext uri="{28A0092B-C50C-407E-A947-70E740481C1C}">
-                <a14:useLocalDpi xmlns:a14="http://schemas.microsoft.com/office/drawing/2010/main" val="0"/>
-              </a:ext>
-            </a:extLst>
-          </a:blip>
-          <a:stretch>
-            <a:fillRect/>
-          </a:stretch>
-        </p:blipFill>
-        <p:spPr>
-          <a:xfrm>
-            <a:off x="2534694" y="1058029"/>
-            <a:ext cx="7122610" cy="2684890"/>
-          </a:xfrm>
-          <a:prstGeom prst="rect">
-            <a:avLst/>
-          </a:prstGeom>
-        </p:spPr>
-      </p:pic>
-      <p:pic>
-        <p:nvPicPr>
-          <p:cNvPr id="9" name="図 8">
-            <a:extLst>
-              <a:ext uri="{FF2B5EF4-FFF2-40B4-BE49-F238E27FC236}">
-                <a16:creationId xmlns:a16="http://schemas.microsoft.com/office/drawing/2014/main" id="{0864B240-C539-C44B-ADEF-1C2F995C831E}"/>
-              </a:ext>
-            </a:extLst>
-          </p:cNvPr>
-          <p:cNvPicPr>
-            <a:picLocks noChangeAspect="1"/>
-          </p:cNvPicPr>
-          <p:nvPr/>
-        </p:nvPicPr>
-        <p:blipFill>
-          <a:blip r:embed="rId9">
-            <a:extLst>
-              <a:ext uri="{28A0092B-C50C-407E-A947-70E740481C1C}">
-                <a14:useLocalDpi xmlns:a14="http://schemas.microsoft.com/office/drawing/2010/main" val="0"/>
-              </a:ext>
-            </a:extLst>
-          </a:blip>
-          <a:stretch>
-            <a:fillRect/>
-          </a:stretch>
-        </p:blipFill>
-        <p:spPr>
-          <a:xfrm>
-            <a:off x="2231878" y="3321277"/>
-            <a:ext cx="7961993" cy="3403600"/>
-          </a:xfrm>
-          <a:prstGeom prst="rect">
-            <a:avLst/>
-          </a:prstGeom>
-        </p:spPr>
-      </p:pic>
-    </p:spTree>
-    <p:extLst>
-      <p:ext uri="{BB962C8B-B14F-4D97-AF65-F5344CB8AC3E}">
-        <p14:creationId xmlns:p14="http://schemas.microsoft.com/office/powerpoint/2010/main" val="4135671268"/>
       </p:ext>
     </p:extLst>
   </p:cSld>
@@ -26084,4 +26963,319 @@
     </a:ext>
   </a:extLst>
 </a:theme>
+</file>
+
+<file path=ppt/theme/theme2.xml><?xml version="1.0" encoding="utf-8"?>
+<a:theme xmlns:a="http://schemas.openxmlformats.org/drawingml/2006/main" name="Office テーマ">
+  <a:themeElements>
+    <a:clrScheme name="Office">
+      <a:dk1>
+        <a:sysClr val="windowText" lastClr="000000"/>
+      </a:dk1>
+      <a:lt1>
+        <a:sysClr val="window" lastClr="FFFFFF"/>
+      </a:lt1>
+      <a:dk2>
+        <a:srgbClr val="0E2841"/>
+      </a:dk2>
+      <a:lt2>
+        <a:srgbClr val="E8E8E8"/>
+      </a:lt2>
+      <a:accent1>
+        <a:srgbClr val="156082"/>
+      </a:accent1>
+      <a:accent2>
+        <a:srgbClr val="E97132"/>
+      </a:accent2>
+      <a:accent3>
+        <a:srgbClr val="196B24"/>
+      </a:accent3>
+      <a:accent4>
+        <a:srgbClr val="0F9ED5"/>
+      </a:accent4>
+      <a:accent5>
+        <a:srgbClr val="A02B93"/>
+      </a:accent5>
+      <a:accent6>
+        <a:srgbClr val="4EA72E"/>
+      </a:accent6>
+      <a:hlink>
+        <a:srgbClr val="467886"/>
+      </a:hlink>
+      <a:folHlink>
+        <a:srgbClr val="96607D"/>
+      </a:folHlink>
+    </a:clrScheme>
+    <a:fontScheme name="Office">
+      <a:majorFont>
+        <a:latin typeface="游ゴシック Light" panose="02110004020202020204"/>
+        <a:ea typeface=""/>
+        <a:cs typeface=""/>
+        <a:font script="Jpan" typeface="游ゴシック Light"/>
+        <a:font script="Hang" typeface="맑은 고딕"/>
+        <a:font script="Hans" typeface="等线 Light"/>
+        <a:font script="Hant" typeface="新細明體"/>
+        <a:font script="Arab" typeface="Times New Roman"/>
+        <a:font script="Hebr" typeface="Times New Roman"/>
+        <a:font script="Thai" typeface="Angsana New"/>
+        <a:font script="Ethi" typeface="Nyala"/>
+        <a:font script="Beng" typeface="Vrinda"/>
+        <a:font script="Gujr" typeface="Shruti"/>
+        <a:font script="Khmr" typeface="MoolBoran"/>
+        <a:font script="Knda" typeface="Tunga"/>
+        <a:font script="Guru" typeface="Raavi"/>
+        <a:font script="Cans" typeface="Euphemia"/>
+        <a:font script="Cher" typeface="Plantagenet Cherokee"/>
+        <a:font script="Yiii" typeface="Microsoft Yi Baiti"/>
+        <a:font script="Tibt" typeface="Microsoft Himalaya"/>
+        <a:font script="Thaa" typeface="MV Boli"/>
+        <a:font script="Deva" typeface="Mangal"/>
+        <a:font script="Telu" typeface="Gautami"/>
+        <a:font script="Taml" typeface="Latha"/>
+        <a:font script="Syrc" typeface="Estrangelo Edessa"/>
+        <a:font script="Orya" typeface="Kalinga"/>
+        <a:font script="Mlym" typeface="Kartika"/>
+        <a:font script="Laoo" typeface="DokChampa"/>
+        <a:font script="Sinh" typeface="Iskoola Pota"/>
+        <a:font script="Mong" typeface="Mongolian Baiti"/>
+        <a:font script="Viet" typeface="Times New Roman"/>
+        <a:font script="Uigh" typeface="Microsoft Uighur"/>
+        <a:font script="Geor" typeface="Sylfaen"/>
+        <a:font script="Armn" typeface="Arial"/>
+        <a:font script="Bugi" typeface="Leelawadee UI"/>
+        <a:font script="Bopo" typeface="Microsoft JhengHei"/>
+        <a:font script="Java" typeface="Javanese Text"/>
+        <a:font script="Lisu" typeface="Segoe UI"/>
+        <a:font script="Mymr" typeface="Myanmar Text"/>
+        <a:font script="Nkoo" typeface="Ebrima"/>
+        <a:font script="Olck" typeface="Nirmala UI"/>
+        <a:font script="Osma" typeface="Ebrima"/>
+        <a:font script="Phag" typeface="Phagspa"/>
+        <a:font script="Syrn" typeface="Estrangelo Edessa"/>
+        <a:font script="Syrj" typeface="Estrangelo Edessa"/>
+        <a:font script="Syre" typeface="Estrangelo Edessa"/>
+        <a:font script="Sora" typeface="Nirmala UI"/>
+        <a:font script="Tale" typeface="Microsoft Tai Le"/>
+        <a:font script="Talu" typeface="Microsoft New Tai Lue"/>
+        <a:font script="Tfng" typeface="Ebrima"/>
+      </a:majorFont>
+      <a:minorFont>
+        <a:latin typeface="游ゴシック" panose="02110004020202020204"/>
+        <a:ea typeface=""/>
+        <a:cs typeface=""/>
+        <a:font script="Jpan" typeface="游ゴシック"/>
+        <a:font script="Hang" typeface="맑은 고딕"/>
+        <a:font script="Hans" typeface="等线"/>
+        <a:font script="Hant" typeface="新細明體"/>
+        <a:font script="Arab" typeface="Arial"/>
+        <a:font script="Hebr" typeface="Arial"/>
+        <a:font script="Thai" typeface="Cordia New"/>
+        <a:font script="Ethi" typeface="Nyala"/>
+        <a:font script="Beng" typeface="Vrinda"/>
+        <a:font script="Gujr" typeface="Shruti"/>
+        <a:font script="Khmr" typeface="DaunPenh"/>
+        <a:font script="Knda" typeface="Tunga"/>
+        <a:font script="Guru" typeface="Raavi"/>
+        <a:font script="Cans" typeface="Euphemia"/>
+        <a:font script="Cher" typeface="Plantagenet Cherokee"/>
+        <a:font script="Yiii" typeface="Microsoft Yi Baiti"/>
+        <a:font script="Tibt" typeface="Microsoft Himalaya"/>
+        <a:font script="Thaa" typeface="MV Boli"/>
+        <a:font script="Deva" typeface="Mangal"/>
+        <a:font script="Telu" typeface="Gautami"/>
+        <a:font script="Taml" typeface="Latha"/>
+        <a:font script="Syrc" typeface="Estrangelo Edessa"/>
+        <a:font script="Orya" typeface="Kalinga"/>
+        <a:font script="Mlym" typeface="Kartika"/>
+        <a:font script="Laoo" typeface="DokChampa"/>
+        <a:font script="Sinh" typeface="Iskoola Pota"/>
+        <a:font script="Mong" typeface="Mongolian Baiti"/>
+        <a:font script="Viet" typeface="Arial"/>
+        <a:font script="Uigh" typeface="Microsoft Uighur"/>
+        <a:font script="Geor" typeface="Sylfaen"/>
+        <a:font script="Armn" typeface="Arial"/>
+        <a:font script="Bugi" typeface="Leelawadee UI"/>
+        <a:font script="Bopo" typeface="Microsoft JhengHei"/>
+        <a:font script="Java" typeface="Javanese Text"/>
+        <a:font script="Lisu" typeface="Segoe UI"/>
+        <a:font script="Mymr" typeface="Myanmar Text"/>
+        <a:font script="Nkoo" typeface="Ebrima"/>
+        <a:font script="Olck" typeface="Nirmala UI"/>
+        <a:font script="Osma" typeface="Ebrima"/>
+        <a:font script="Phag" typeface="Phagspa"/>
+        <a:font script="Syrn" typeface="Estrangelo Edessa"/>
+        <a:font script="Syrj" typeface="Estrangelo Edessa"/>
+        <a:font script="Syre" typeface="Estrangelo Edessa"/>
+        <a:font script="Sora" typeface="Nirmala UI"/>
+        <a:font script="Tale" typeface="Microsoft Tai Le"/>
+        <a:font script="Talu" typeface="Microsoft New Tai Lue"/>
+        <a:font script="Tfng" typeface="Ebrima"/>
+      </a:minorFont>
+    </a:fontScheme>
+    <a:fmtScheme name="Office">
+      <a:fillStyleLst>
+        <a:solidFill>
+          <a:schemeClr val="phClr"/>
+        </a:solidFill>
+        <a:gradFill rotWithShape="1">
+          <a:gsLst>
+            <a:gs pos="0">
+              <a:schemeClr val="phClr">
+                <a:lumMod val="110000"/>
+                <a:satMod val="105000"/>
+                <a:tint val="67000"/>
+              </a:schemeClr>
+            </a:gs>
+            <a:gs pos="50000">
+              <a:schemeClr val="phClr">
+                <a:lumMod val="105000"/>
+                <a:satMod val="103000"/>
+                <a:tint val="73000"/>
+              </a:schemeClr>
+            </a:gs>
+            <a:gs pos="100000">
+              <a:schemeClr val="phClr">
+                <a:lumMod val="105000"/>
+                <a:satMod val="109000"/>
+                <a:tint val="81000"/>
+              </a:schemeClr>
+            </a:gs>
+          </a:gsLst>
+          <a:lin ang="5400000" scaled="0"/>
+        </a:gradFill>
+        <a:gradFill rotWithShape="1">
+          <a:gsLst>
+            <a:gs pos="0">
+              <a:schemeClr val="phClr">
+                <a:satMod val="103000"/>
+                <a:lumMod val="102000"/>
+                <a:tint val="94000"/>
+              </a:schemeClr>
+            </a:gs>
+            <a:gs pos="50000">
+              <a:schemeClr val="phClr">
+                <a:satMod val="110000"/>
+                <a:lumMod val="100000"/>
+                <a:shade val="100000"/>
+              </a:schemeClr>
+            </a:gs>
+            <a:gs pos="100000">
+              <a:schemeClr val="phClr">
+                <a:lumMod val="99000"/>
+                <a:satMod val="120000"/>
+                <a:shade val="78000"/>
+              </a:schemeClr>
+            </a:gs>
+          </a:gsLst>
+          <a:lin ang="5400000" scaled="0"/>
+        </a:gradFill>
+      </a:fillStyleLst>
+      <a:lnStyleLst>
+        <a:ln w="12700" cap="flat" cmpd="sng" algn="ctr">
+          <a:solidFill>
+            <a:schemeClr val="phClr"/>
+          </a:solidFill>
+          <a:prstDash val="solid"/>
+          <a:miter lim="800000"/>
+        </a:ln>
+        <a:ln w="19050" cap="flat" cmpd="sng" algn="ctr">
+          <a:solidFill>
+            <a:schemeClr val="phClr"/>
+          </a:solidFill>
+          <a:prstDash val="solid"/>
+          <a:miter lim="800000"/>
+        </a:ln>
+        <a:ln w="25400" cap="flat" cmpd="sng" algn="ctr">
+          <a:solidFill>
+            <a:schemeClr val="phClr"/>
+          </a:solidFill>
+          <a:prstDash val="solid"/>
+          <a:miter lim="800000"/>
+        </a:ln>
+      </a:lnStyleLst>
+      <a:effectStyleLst>
+        <a:effectStyle>
+          <a:effectLst/>
+        </a:effectStyle>
+        <a:effectStyle>
+          <a:effectLst/>
+        </a:effectStyle>
+        <a:effectStyle>
+          <a:effectLst>
+            <a:outerShdw blurRad="57150" dist="19050" dir="5400000" algn="ctr" rotWithShape="0">
+              <a:srgbClr val="000000">
+                <a:alpha val="63000"/>
+              </a:srgbClr>
+            </a:outerShdw>
+          </a:effectLst>
+        </a:effectStyle>
+      </a:effectStyleLst>
+      <a:bgFillStyleLst>
+        <a:solidFill>
+          <a:schemeClr val="phClr"/>
+        </a:solidFill>
+        <a:solidFill>
+          <a:schemeClr val="phClr">
+            <a:tint val="95000"/>
+            <a:satMod val="170000"/>
+          </a:schemeClr>
+        </a:solidFill>
+        <a:gradFill rotWithShape="1">
+          <a:gsLst>
+            <a:gs pos="0">
+              <a:schemeClr val="phClr">
+                <a:tint val="93000"/>
+                <a:satMod val="150000"/>
+                <a:shade val="98000"/>
+                <a:lumMod val="102000"/>
+              </a:schemeClr>
+            </a:gs>
+            <a:gs pos="50000">
+              <a:schemeClr val="phClr">
+                <a:tint val="98000"/>
+                <a:satMod val="130000"/>
+                <a:shade val="90000"/>
+                <a:lumMod val="103000"/>
+              </a:schemeClr>
+            </a:gs>
+            <a:gs pos="100000">
+              <a:schemeClr val="phClr">
+                <a:shade val="63000"/>
+                <a:satMod val="120000"/>
+              </a:schemeClr>
+            </a:gs>
+          </a:gsLst>
+          <a:lin ang="5400000" scaled="0"/>
+        </a:gradFill>
+      </a:bgFillStyleLst>
+    </a:fmtScheme>
+  </a:themeElements>
+  <a:objectDefaults>
+    <a:lnDef>
+      <a:spPr/>
+      <a:bodyPr/>
+      <a:lstStyle/>
+      <a:style>
+        <a:lnRef idx="2">
+          <a:schemeClr val="accent1"/>
+        </a:lnRef>
+        <a:fillRef idx="0">
+          <a:schemeClr val="accent1"/>
+        </a:fillRef>
+        <a:effectRef idx="1">
+          <a:schemeClr val="accent1"/>
+        </a:effectRef>
+        <a:fontRef idx="minor">
+          <a:schemeClr val="tx1"/>
+        </a:fontRef>
+      </a:style>
+    </a:lnDef>
+  </a:objectDefaults>
+  <a:extraClrSchemeLst/>
+  <a:extLst>
+    <a:ext uri="{05A4C25C-085E-4340-85A3-A5531E510DB2}">
+      <thm15:themeFamily xmlns:thm15="http://schemas.microsoft.com/office/thememl/2012/main" name="Office Theme" id="{2E142A2C-CD16-42D6-873A-C26D2A0506FA}" vid="{1BDDFF52-6CD6-40A5-AB3C-68EB2F1E4D0A}"/>
+    </a:ext>
+  </a:extLst>
+</a:theme>
 </file>